--- a/aulas/aula-05-projeto-seguro.pptx
+++ b/aulas/aula-05-projeto-seguro.pptx
@@ -6,15 +6,16 @@
   </p:sldMasterIdLst>
   <p:sldIdLst>
     <p:sldId id="256" r:id="rId7"/>
-    <p:sldId id="257" r:id="rId8"/>
-    <p:sldId id="258" r:id="rId9"/>
-    <p:sldId id="259" r:id="rId10"/>
-    <p:sldId id="260" r:id="rId11"/>
-    <p:sldId id="261" r:id="rId12"/>
-    <p:sldId id="262" r:id="rId13"/>
-    <p:sldId id="263" r:id="rId14"/>
-    <p:sldId id="264" r:id="rId15"/>
-    <p:sldId id="265" r:id="rId16"/>
+    <p:sldId id="257" r:id="rId9"/>
+    <p:sldId id="258" r:id="rId10"/>
+    <p:sldId id="259" r:id="rId11"/>
+    <p:sldId id="260" r:id="rId12"/>
+    <p:sldId id="261" r:id="rId13"/>
+    <p:sldId id="262" r:id="rId14"/>
+    <p:sldId id="263" r:id="rId15"/>
+    <p:sldId id="264" r:id="rId16"/>
+    <p:sldId id="265" r:id="rId17"/>
+    <p:sldId id="266" r:id="rId18"/>
   </p:sldIdLst>
   <p:sldSz cx="12191695" cy="6858000" type="screen4x3"/>
   <p:notesSz cx="6858000" cy="9144000"/>
@@ -114,6 +115,846 @@
     </a:lvl9pPr>
   </p:defaultTextStyle>
 </p:presentation>
+</file>
+
+<file path=ppt/notesMasters/notesMaster1.xml><?xml version="1.0" encoding="utf-8"?>
+<p:notesMaster xmlns:a="http://schemas.openxmlformats.org/drawingml/2006/main" xmlns:p="http://schemas.openxmlformats.org/presentationml/2006/main" xmlns:r="http://schemas.openxmlformats.org/officeDocument/2006/relationships">
+  <p:cSld>
+    <p:bg>
+      <p:bgRef idx="1001">
+        <a:schemeClr val="bg1"/>
+      </p:bgRef>
+    </p:bg>
+    <p:spTree>
+      <p:nvGrpSpPr>
+        <p:cNvPr id="1" name=""/>
+        <p:cNvGrpSpPr/>
+        <p:nvPr/>
+      </p:nvGrpSpPr>
+      <p:grpSpPr>
+        <a:xfrm>
+          <a:off x="0" y="0"/>
+          <a:ext cx="0" cy="0"/>
+          <a:chOff x="0" y="0"/>
+          <a:chExt cx="0" cy="0"/>
+        </a:xfrm>
+      </p:grpSpPr>
+      <p:sp>
+        <p:nvSpPr>
+          <p:cNvPr id="2" name="Header Placeholder 1"/>
+          <p:cNvSpPr>
+            <a:spLocks noGrp="1"/>
+          </p:cNvSpPr>
+          <p:nvPr>
+            <p:ph type="hdr" sz="quarter"/>
+          </p:nvPr>
+        </p:nvSpPr>
+        <p:spPr>
+          <a:xfrm>
+            <a:off x="0" y="0"/>
+            <a:ext cx="2971800" cy="457200"/>
+          </a:xfrm>
+          <a:prstGeom prst="rect">
+            <a:avLst/>
+          </a:prstGeom>
+        </p:spPr>
+        <p:txBody>
+          <a:bodyPr vert="horz" lIns="91440" tIns="45720" rIns="91440" bIns="45720" rtlCol="0"/>
+          <a:lstStyle>
+            <a:lvl1pPr algn="l">
+              <a:defRPr sz="1200"/>
+            </a:lvl1pPr>
+          </a:lstStyle>
+          <a:p>
+            <a:endParaRPr lang="en-US"/>
+          </a:p>
+        </p:txBody>
+      </p:sp>
+      <p:sp>
+        <p:nvSpPr>
+          <p:cNvPr id="3" name="Date Placeholder 2"/>
+          <p:cNvSpPr>
+            <a:spLocks noGrp="1"/>
+          </p:cNvSpPr>
+          <p:nvPr>
+            <p:ph type="dt" idx="1"/>
+          </p:nvPr>
+        </p:nvSpPr>
+        <p:spPr>
+          <a:xfrm>
+            <a:off x="3884613" y="0"/>
+            <a:ext cx="2971800" cy="457200"/>
+          </a:xfrm>
+          <a:prstGeom prst="rect">
+            <a:avLst/>
+          </a:prstGeom>
+        </p:spPr>
+        <p:txBody>
+          <a:bodyPr vert="horz" lIns="91440" tIns="45720" rIns="91440" bIns="45720" rtlCol="0"/>
+          <a:lstStyle>
+            <a:lvl1pPr algn="r">
+              <a:defRPr sz="1200"/>
+            </a:lvl1pPr>
+          </a:lstStyle>
+          <a:p>
+            <a:fld id="{0F89C1C7-3DCD-1040-A9CF-14679D8B5DDD}" type="datetimeFigureOut">
+              <a:rPr lang="en-US" smtClean="0"/>
+              <a:t>10/17/16</a:t>
+            </a:fld>
+            <a:endParaRPr lang="en-US"/>
+          </a:p>
+        </p:txBody>
+      </p:sp>
+      <p:sp>
+        <p:nvSpPr>
+          <p:cNvPr id="4" name="Slide Image Placeholder 3"/>
+          <p:cNvSpPr>
+            <a:spLocks noGrp="1" noRot="1" noChangeAspect="1"/>
+          </p:cNvSpPr>
+          <p:nvPr>
+            <p:ph type="sldImg" idx="2"/>
+          </p:nvPr>
+        </p:nvSpPr>
+        <p:spPr>
+          <a:xfrm>
+            <a:off x="1143000" y="685800"/>
+            <a:ext cx="4572000" cy="3429000"/>
+          </a:xfrm>
+          <a:prstGeom prst="rect">
+            <a:avLst/>
+          </a:prstGeom>
+          <a:noFill/>
+          <a:ln w="12700">
+            <a:solidFill>
+              <a:prstClr val="black"/>
+            </a:solidFill>
+          </a:ln>
+        </p:spPr>
+        <p:txBody>
+          <a:bodyPr vert="horz" lIns="91440" tIns="45720" rIns="91440" bIns="45720" rtlCol="0" anchor="ctr"/>
+          <a:lstStyle/>
+          <a:p>
+            <a:endParaRPr lang="en-US"/>
+          </a:p>
+        </p:txBody>
+      </p:sp>
+      <p:sp>
+        <p:nvSpPr>
+          <p:cNvPr id="5" name="Notes Placeholder 4"/>
+          <p:cNvSpPr>
+            <a:spLocks noGrp="1"/>
+          </p:cNvSpPr>
+          <p:nvPr>
+            <p:ph type="body" sz="quarter" idx="3"/>
+          </p:nvPr>
+        </p:nvSpPr>
+        <p:spPr>
+          <a:xfrm>
+            <a:off x="685800" y="4343400"/>
+            <a:ext cx="5486400" cy="4114800"/>
+          </a:xfrm>
+          <a:prstGeom prst="rect">
+            <a:avLst/>
+          </a:prstGeom>
+        </p:spPr>
+        <p:txBody>
+          <a:bodyPr vert="horz" lIns="91440" tIns="45720" rIns="91440" bIns="45720" rtlCol="0"/>
+          <a:lstStyle/>
+          <a:p>
+            <a:pPr lvl="0"/>
+            <a:r>
+              <a:rPr lang="en-US" smtClean="0"/>
+              <a:t>Click to edit Master text styles</a:t>
+            </a:r>
+          </a:p>
+          <a:p>
+            <a:pPr lvl="1"/>
+            <a:r>
+              <a:rPr lang="en-US" smtClean="0"/>
+              <a:t>Second level</a:t>
+            </a:r>
+          </a:p>
+          <a:p>
+            <a:pPr lvl="2"/>
+            <a:r>
+              <a:rPr lang="en-US" smtClean="0"/>
+              <a:t>Third level</a:t>
+            </a:r>
+          </a:p>
+          <a:p>
+            <a:pPr lvl="3"/>
+            <a:r>
+              <a:rPr lang="en-US" smtClean="0"/>
+              <a:t>Fourth level</a:t>
+            </a:r>
+          </a:p>
+          <a:p>
+            <a:pPr lvl="4"/>
+            <a:r>
+              <a:rPr lang="en-US" smtClean="0"/>
+              <a:t>Fifth level</a:t>
+            </a:r>
+            <a:endParaRPr lang="en-US"/>
+          </a:p>
+        </p:txBody>
+      </p:sp>
+      <p:sp>
+        <p:nvSpPr>
+          <p:cNvPr id="6" name="Footer Placeholder 5"/>
+          <p:cNvSpPr>
+            <a:spLocks noGrp="1"/>
+          </p:cNvSpPr>
+          <p:nvPr>
+            <p:ph type="ftr" sz="quarter" idx="4"/>
+          </p:nvPr>
+        </p:nvSpPr>
+        <p:spPr>
+          <a:xfrm>
+            <a:off x="0" y="8685213"/>
+            <a:ext cx="2971800" cy="457200"/>
+          </a:xfrm>
+          <a:prstGeom prst="rect">
+            <a:avLst/>
+          </a:prstGeom>
+        </p:spPr>
+        <p:txBody>
+          <a:bodyPr vert="horz" lIns="91440" tIns="45720" rIns="91440" bIns="45720" rtlCol="0" anchor="b"/>
+          <a:lstStyle>
+            <a:lvl1pPr algn="l">
+              <a:defRPr sz="1200"/>
+            </a:lvl1pPr>
+          </a:lstStyle>
+          <a:p>
+            <a:endParaRPr lang="en-US"/>
+          </a:p>
+        </p:txBody>
+      </p:sp>
+      <p:sp>
+        <p:nvSpPr>
+          <p:cNvPr id="7" name="Slide Number Placeholder 6"/>
+          <p:cNvSpPr>
+            <a:spLocks noGrp="1"/>
+          </p:cNvSpPr>
+          <p:nvPr>
+            <p:ph type="sldNum" sz="quarter" idx="5"/>
+          </p:nvPr>
+        </p:nvSpPr>
+        <p:spPr>
+          <a:xfrm>
+            <a:off x="3884613" y="8685213"/>
+            <a:ext cx="2971800" cy="457200"/>
+          </a:xfrm>
+          <a:prstGeom prst="rect">
+            <a:avLst/>
+          </a:prstGeom>
+        </p:spPr>
+        <p:txBody>
+          <a:bodyPr vert="horz" lIns="91440" tIns="45720" rIns="91440" bIns="45720" rtlCol="0" anchor="b"/>
+          <a:lstStyle>
+            <a:lvl1pPr algn="r">
+              <a:defRPr sz="1200"/>
+            </a:lvl1pPr>
+          </a:lstStyle>
+          <a:p>
+            <a:fld id="{BB5E49A5-4136-284D-997B-48E1D791AD67}" type="slidenum">
+              <a:rPr lang="en-US" smtClean="0"/>
+              <a:t>‹#›</a:t>
+            </a:fld>
+            <a:endParaRPr lang="en-US"/>
+          </a:p>
+        </p:txBody>
+      </p:sp>
+    </p:spTree>
+    <p:extLst>
+      <p:ext uri="{BB962C8B-B14F-4D97-AF65-F5344CB8AC3E}">
+        <p14:creationId xmlns:p14="http://schemas.microsoft.com/office/powerpoint/2010/main" val="2623252185"/>
+      </p:ext>
+    </p:extLst>
+  </p:cSld>
+  <p:clrMap bg1="lt1" tx1="dk1" bg2="lt2" tx2="dk2" accent1="accent1" accent2="accent2" accent3="accent3" accent4="accent4" accent5="accent5" accent6="accent6" hlink="hlink" folHlink="folHlink"/>
+  <p:notesStyle>
+    <a:lvl1pPr marL="0" algn="l" defTabSz="457200" rtl="0" eaLnBrk="1" latinLnBrk="0" hangingPunct="1">
+      <a:defRPr sz="1200" kern="1200">
+        <a:solidFill>
+          <a:schemeClr val="tx1"/>
+        </a:solidFill>
+        <a:latin typeface="+mn-lt"/>
+        <a:ea typeface="+mn-ea"/>
+        <a:cs typeface="+mn-cs"/>
+      </a:defRPr>
+    </a:lvl1pPr>
+    <a:lvl2pPr marL="457200" algn="l" defTabSz="457200" rtl="0" eaLnBrk="1" latinLnBrk="0" hangingPunct="1">
+      <a:defRPr sz="1200" kern="1200">
+        <a:solidFill>
+          <a:schemeClr val="tx1"/>
+        </a:solidFill>
+        <a:latin typeface="+mn-lt"/>
+        <a:ea typeface="+mn-ea"/>
+        <a:cs typeface="+mn-cs"/>
+      </a:defRPr>
+    </a:lvl2pPr>
+    <a:lvl3pPr marL="914400" algn="l" defTabSz="457200" rtl="0" eaLnBrk="1" latinLnBrk="0" hangingPunct="1">
+      <a:defRPr sz="1200" kern="1200">
+        <a:solidFill>
+          <a:schemeClr val="tx1"/>
+        </a:solidFill>
+        <a:latin typeface="+mn-lt"/>
+        <a:ea typeface="+mn-ea"/>
+        <a:cs typeface="+mn-cs"/>
+      </a:defRPr>
+    </a:lvl3pPr>
+    <a:lvl4pPr marL="1371600" algn="l" defTabSz="457200" rtl="0" eaLnBrk="1" latinLnBrk="0" hangingPunct="1">
+      <a:defRPr sz="1200" kern="1200">
+        <a:solidFill>
+          <a:schemeClr val="tx1"/>
+        </a:solidFill>
+        <a:latin typeface="+mn-lt"/>
+        <a:ea typeface="+mn-ea"/>
+        <a:cs typeface="+mn-cs"/>
+      </a:defRPr>
+    </a:lvl4pPr>
+    <a:lvl5pPr marL="1828800" algn="l" defTabSz="457200" rtl="0" eaLnBrk="1" latinLnBrk="0" hangingPunct="1">
+      <a:defRPr sz="1200" kern="1200">
+        <a:solidFill>
+          <a:schemeClr val="tx1"/>
+        </a:solidFill>
+        <a:latin typeface="+mn-lt"/>
+        <a:ea typeface="+mn-ea"/>
+        <a:cs typeface="+mn-cs"/>
+      </a:defRPr>
+    </a:lvl5pPr>
+    <a:lvl6pPr marL="2286000" algn="l" defTabSz="457200" rtl="0" eaLnBrk="1" latinLnBrk="0" hangingPunct="1">
+      <a:defRPr sz="1200" kern="1200">
+        <a:solidFill>
+          <a:schemeClr val="tx1"/>
+        </a:solidFill>
+        <a:latin typeface="+mn-lt"/>
+        <a:ea typeface="+mn-ea"/>
+        <a:cs typeface="+mn-cs"/>
+      </a:defRPr>
+    </a:lvl6pPr>
+    <a:lvl7pPr marL="2743200" algn="l" defTabSz="457200" rtl="0" eaLnBrk="1" latinLnBrk="0" hangingPunct="1">
+      <a:defRPr sz="1200" kern="1200">
+        <a:solidFill>
+          <a:schemeClr val="tx1"/>
+        </a:solidFill>
+        <a:latin typeface="+mn-lt"/>
+        <a:ea typeface="+mn-ea"/>
+        <a:cs typeface="+mn-cs"/>
+      </a:defRPr>
+    </a:lvl7pPr>
+    <a:lvl8pPr marL="3200400" algn="l" defTabSz="457200" rtl="0" eaLnBrk="1" latinLnBrk="0" hangingPunct="1">
+      <a:defRPr sz="1200" kern="1200">
+        <a:solidFill>
+          <a:schemeClr val="tx1"/>
+        </a:solidFill>
+        <a:latin typeface="+mn-lt"/>
+        <a:ea typeface="+mn-ea"/>
+        <a:cs typeface="+mn-cs"/>
+      </a:defRPr>
+    </a:lvl8pPr>
+    <a:lvl9pPr marL="3657600" algn="l" defTabSz="457200" rtl="0" eaLnBrk="1" latinLnBrk="0" hangingPunct="1">
+      <a:defRPr sz="1200" kern="1200">
+        <a:solidFill>
+          <a:schemeClr val="tx1"/>
+        </a:solidFill>
+        <a:latin typeface="+mn-lt"/>
+        <a:ea typeface="+mn-ea"/>
+        <a:cs typeface="+mn-cs"/>
+      </a:defRPr>
+    </a:lvl9pPr>
+  </p:notesStyle>
+</p:notesMaster>
+</file>
+
+<file path=ppt/notesSlides/notesSlide1.xml><?xml version="1.0" encoding="utf-8"?>
+<p:notes xmlns:a="http://schemas.openxmlformats.org/drawingml/2006/main" xmlns:p="http://schemas.openxmlformats.org/presentationml/2006/main" xmlns:r="http://schemas.openxmlformats.org/officeDocument/2006/relationships">
+  <p:cSld>
+    <p:spTree>
+      <p:nvGrpSpPr>
+        <p:cNvPr id="1" name=""/>
+        <p:cNvGrpSpPr/>
+        <p:nvPr/>
+      </p:nvGrpSpPr>
+      <p:grpSpPr>
+        <a:xfrm>
+          <a:off x="0" y="0"/>
+          <a:ext cx="0" cy="0"/>
+          <a:chOff x="0" y="0"/>
+          <a:chExt cx="0" cy="0"/>
+        </a:xfrm>
+      </p:grpSpPr>
+      <p:sp>
+        <p:nvSpPr>
+          <p:cNvPr id="2" name="Slide Image Placeholder 1"/>
+          <p:cNvSpPr>
+            <a:spLocks noGrp="1"/>
+          </p:cNvSpPr>
+          <p:nvPr>
+            <p:ph type="sldImg" idx="2"/>
+          </p:nvPr>
+        </p:nvSpPr>
+        <p:spPr/>
+      </p:sp>
+      <p:sp>
+        <p:nvSpPr>
+          <p:cNvPr id="3" name="Notes Placeholder 2"/>
+          <p:cNvSpPr>
+            <a:spLocks noGrp="1"/>
+          </p:cNvSpPr>
+          <p:nvPr>
+            <p:ph type="body" idx="3" sz="quarter"/>
+          </p:nvPr>
+        </p:nvSpPr>
+        <p:spPr/>
+        <p:txBody>
+          <a:bodyPr/>
+          <a:lstStyle/>
+          <a:p>
+            <a:r>
+              <a:t>Aula 5. Antes de codar, decidimos COMO os controles serão construídos: princípios de design seguro, priorização por risco e a Definition of Done. Entregável: catálogo consolidado (RFS+RGS) + priorização + DoD (Fase 3).</a:t>
+            </a:r>
+          </a:p>
+        </p:txBody>
+      </p:sp>
+      <p:sp>
+        <p:nvSpPr>
+          <p:cNvPr id="4" name="Slide Number Placeholder 3"/>
+          <p:cNvSpPr>
+            <a:spLocks noGrp="1"/>
+          </p:cNvSpPr>
+          <p:nvPr>
+            <p:ph type="sldNum" idx="5" sz="quarter"/>
+          </p:nvPr>
+        </p:nvSpPr>
+        <p:spPr/>
+      </p:sp>
+    </p:spTree>
+  </p:cSld>
+  <p:clrMapOvr>
+    <a:masterClrMapping/>
+  </p:clrMapOvr>
+</p:notes>
+</file>
+
+<file path=ppt/notesSlides/notesSlide2.xml><?xml version="1.0" encoding="utf-8"?>
+<p:notes xmlns:a="http://schemas.openxmlformats.org/drawingml/2006/main" xmlns:p="http://schemas.openxmlformats.org/presentationml/2006/main" xmlns:r="http://schemas.openxmlformats.org/officeDocument/2006/relationships">
+  <p:cSld>
+    <p:spTree>
+      <p:nvGrpSpPr>
+        <p:cNvPr id="1" name=""/>
+        <p:cNvGrpSpPr/>
+        <p:nvPr/>
+      </p:nvGrpSpPr>
+      <p:grpSpPr>
+        <a:xfrm>
+          <a:off x="0" y="0"/>
+          <a:ext cx="0" cy="0"/>
+          <a:chOff x="0" y="0"/>
+          <a:chExt cx="0" cy="0"/>
+        </a:xfrm>
+      </p:grpSpPr>
+      <p:sp>
+        <p:nvSpPr>
+          <p:cNvPr id="2" name="Slide Image Placeholder 1"/>
+          <p:cNvSpPr>
+            <a:spLocks noGrp="1"/>
+          </p:cNvSpPr>
+          <p:nvPr>
+            <p:ph type="sldImg" idx="2"/>
+          </p:nvPr>
+        </p:nvSpPr>
+        <p:spPr/>
+      </p:sp>
+      <p:sp>
+        <p:nvSpPr>
+          <p:cNvPr id="3" name="Notes Placeholder 2"/>
+          <p:cNvSpPr>
+            <a:spLocks noGrp="1"/>
+          </p:cNvSpPr>
+          <p:nvPr>
+            <p:ph type="body" idx="3" sz="quarter"/>
+          </p:nvPr>
+        </p:nvSpPr>
+        <p:spPr/>
+        <p:txBody>
+          <a:bodyPr/>
+          <a:lstStyle/>
+          <a:p>
+            <a:r>
+              <a:t>Estes princípios atravessaram 50 anos e fundamentam Microsoft SDL, NIST SSDF e CSSLP. Os mais usados no dia a dia: fail-safe defaults (deny by default), complete mediation (verifique SEMPRE — não confie que 'já autenticou antes') e least privilege. No VidaPlus, o IDOR viola complete mediation; o banco com usuário root viola least privilege.</a:t>
+            </a:r>
+          </a:p>
+        </p:txBody>
+      </p:sp>
+      <p:sp>
+        <p:nvSpPr>
+          <p:cNvPr id="4" name="Slide Number Placeholder 3"/>
+          <p:cNvSpPr>
+            <a:spLocks noGrp="1"/>
+          </p:cNvSpPr>
+          <p:nvPr>
+            <p:ph type="sldNum" idx="5" sz="quarter"/>
+          </p:nvPr>
+        </p:nvSpPr>
+        <p:spPr/>
+      </p:sp>
+    </p:spTree>
+  </p:cSld>
+  <p:clrMapOvr>
+    <a:masterClrMapping/>
+  </p:clrMapOvr>
+</p:notes>
+</file>
+
+<file path=ppt/notesSlides/notesSlide3.xml><?xml version="1.0" encoding="utf-8"?>
+<p:notes xmlns:a="http://schemas.openxmlformats.org/drawingml/2006/main" xmlns:p="http://schemas.openxmlformats.org/presentationml/2006/main" xmlns:r="http://schemas.openxmlformats.org/officeDocument/2006/relationships">
+  <p:cSld>
+    <p:spTree>
+      <p:nvGrpSpPr>
+        <p:cNvPr id="1" name=""/>
+        <p:cNvGrpSpPr/>
+        <p:nvPr/>
+      </p:nvGrpSpPr>
+      <p:grpSpPr>
+        <a:xfrm>
+          <a:off x="0" y="0"/>
+          <a:ext cx="0" cy="0"/>
+          <a:chOff x="0" y="0"/>
+          <a:chExt cx="0" cy="0"/>
+        </a:xfrm>
+      </p:grpSpPr>
+      <p:sp>
+        <p:nvSpPr>
+          <p:cNvPr id="2" name="Slide Image Placeholder 1"/>
+          <p:cNvSpPr>
+            <a:spLocks noGrp="1"/>
+          </p:cNvSpPr>
+          <p:nvPr>
+            <p:ph type="sldImg" idx="2"/>
+          </p:nvPr>
+        </p:nvSpPr>
+        <p:spPr/>
+      </p:sp>
+      <p:sp>
+        <p:nvSpPr>
+          <p:cNvPr id="3" name="Notes Placeholder 2"/>
+          <p:cNvSpPr>
+            <a:spLocks noGrp="1"/>
+          </p:cNvSpPr>
+          <p:nvPr>
+            <p:ph type="body" idx="3" sz="quarter"/>
+          </p:nvPr>
+        </p:nvSpPr>
+        <p:spPr/>
+        <p:txBody>
+          <a:bodyPr/>
+          <a:lstStyle/>
+          <a:p>
+            <a:r>
+              <a:t>Falhas VÃO acontecer — a pergunta de design é: para qual estado o sistema recai? Em software de segurança (autenticação, acesso a dado), a resposta é Fail Secure: na dúvida, NEGUE. Fail Safe (na dúvida, preserve vidas) é para sistemas físicos. No VidaPlus, todo controle deve ser fail-secure: erro/timeout -&gt; acesso negado.</a:t>
+            </a:r>
+          </a:p>
+        </p:txBody>
+      </p:sp>
+      <p:sp>
+        <p:nvSpPr>
+          <p:cNvPr id="4" name="Slide Number Placeholder 3"/>
+          <p:cNvSpPr>
+            <a:spLocks noGrp="1"/>
+          </p:cNvSpPr>
+          <p:nvPr>
+            <p:ph type="sldNum" idx="5" sz="quarter"/>
+          </p:nvPr>
+        </p:nvSpPr>
+        <p:spPr/>
+      </p:sp>
+    </p:spTree>
+  </p:cSld>
+  <p:clrMapOvr>
+    <a:masterClrMapping/>
+  </p:clrMapOvr>
+</p:notes>
+</file>
+
+<file path=ppt/notesSlides/notesSlide4.xml><?xml version="1.0" encoding="utf-8"?>
+<p:notes xmlns:a="http://schemas.openxmlformats.org/drawingml/2006/main" xmlns:p="http://schemas.openxmlformats.org/presentationml/2006/main" xmlns:r="http://schemas.openxmlformats.org/officeDocument/2006/relationships">
+  <p:cSld>
+    <p:spTree>
+      <p:nvGrpSpPr>
+        <p:cNvPr id="1" name=""/>
+        <p:cNvGrpSpPr/>
+        <p:nvPr/>
+      </p:nvGrpSpPr>
+      <p:grpSpPr>
+        <a:xfrm>
+          <a:off x="0" y="0"/>
+          <a:ext cx="0" cy="0"/>
+          <a:chOff x="0" y="0"/>
+          <a:chExt cx="0" cy="0"/>
+        </a:xfrm>
+      </p:grpSpPr>
+      <p:sp>
+        <p:nvSpPr>
+          <p:cNvPr id="2" name="Slide Image Placeholder 1"/>
+          <p:cNvSpPr>
+            <a:spLocks noGrp="1"/>
+          </p:cNvSpPr>
+          <p:nvPr>
+            <p:ph type="sldImg" idx="2"/>
+          </p:nvPr>
+        </p:nvSpPr>
+        <p:spPr/>
+      </p:sp>
+      <p:sp>
+        <p:nvSpPr>
+          <p:cNvPr id="3" name="Notes Placeholder 2"/>
+          <p:cNvSpPr>
+            <a:spLocks noGrp="1"/>
+          </p:cNvSpPr>
+          <p:nvPr>
+            <p:ph type="body" idx="3" sz="quarter"/>
+          </p:nvPr>
+        </p:nvSpPr>
+        <p:spPr/>
+        <p:txBody>
+          <a:bodyPr/>
+          <a:lstStyle/>
+          <a:p>
+            <a:r>
+              <a:t>Recursos são finitos: prioriza-se pelo risco = probabilidade × impacto. CVSS pontua a gravidade; DREAD é qualitativo (cuidado com a subjetividade — documente os critérios); EPSS e KEV trazem o contexto REAL de exploração. Um requisito que mitiga risco crítico é P0 e bloqueia o release. Regra: item no KEV promove um nível de prioridade.</a:t>
+            </a:r>
+          </a:p>
+        </p:txBody>
+      </p:sp>
+      <p:sp>
+        <p:nvSpPr>
+          <p:cNvPr id="4" name="Slide Number Placeholder 3"/>
+          <p:cNvSpPr>
+            <a:spLocks noGrp="1"/>
+          </p:cNvSpPr>
+          <p:nvPr>
+            <p:ph type="sldNum" idx="5" sz="quarter"/>
+          </p:nvPr>
+        </p:nvSpPr>
+        <p:spPr/>
+      </p:sp>
+    </p:spTree>
+  </p:cSld>
+  <p:clrMapOvr>
+    <a:masterClrMapping/>
+  </p:clrMapOvr>
+</p:notes>
+</file>
+
+<file path=ppt/notesSlides/notesSlide5.xml><?xml version="1.0" encoding="utf-8"?>
+<p:notes xmlns:a="http://schemas.openxmlformats.org/drawingml/2006/main" xmlns:p="http://schemas.openxmlformats.org/presentationml/2006/main" xmlns:r="http://schemas.openxmlformats.org/officeDocument/2006/relationships">
+  <p:cSld>
+    <p:spTree>
+      <p:nvGrpSpPr>
+        <p:cNvPr id="1" name=""/>
+        <p:cNvGrpSpPr/>
+        <p:nvPr/>
+      </p:nvGrpSpPr>
+      <p:grpSpPr>
+        <a:xfrm>
+          <a:off x="0" y="0"/>
+          <a:ext cx="0" cy="0"/>
+          <a:chOff x="0" y="0"/>
+          <a:chExt cx="0" cy="0"/>
+        </a:xfrm>
+      </p:grpSpPr>
+      <p:sp>
+        <p:nvSpPr>
+          <p:cNvPr id="2" name="Slide Image Placeholder 1"/>
+          <p:cNvSpPr>
+            <a:spLocks noGrp="1"/>
+          </p:cNvSpPr>
+          <p:nvPr>
+            <p:ph type="sldImg" idx="2"/>
+          </p:nvPr>
+        </p:nvSpPr>
+        <p:spPr/>
+      </p:sp>
+      <p:sp>
+        <p:nvSpPr>
+          <p:cNvPr id="3" name="Notes Placeholder 2"/>
+          <p:cNvSpPr>
+            <a:spLocks noGrp="1"/>
+          </p:cNvSpPr>
+          <p:nvPr>
+            <p:ph type="body" idx="3" sz="quarter"/>
+          </p:nvPr>
+        </p:nvSpPr>
+        <p:spPr/>
+        <p:txBody>
+          <a:bodyPr/>
+          <a:lstStyle/>
+          <a:p>
+            <a:r>
+              <a:t>Use pelo menos duas representações por requisito P0: uma para ESPECIFICAR (shall/EARS) e uma para VERIFICAR (BDD/policy-as-code). O BDD é especialmente útil: transforma o requisito num teste executável no CI — requisito e teste viram a mesma coisa. Combine sempre: um diagrama para enxergar, uma frase para especificar, um teste para verificar.</a:t>
+            </a:r>
+          </a:p>
+        </p:txBody>
+      </p:sp>
+      <p:sp>
+        <p:nvSpPr>
+          <p:cNvPr id="4" name="Slide Number Placeholder 3"/>
+          <p:cNvSpPr>
+            <a:spLocks noGrp="1"/>
+          </p:cNvSpPr>
+          <p:nvPr>
+            <p:ph type="sldNum" idx="5" sz="quarter"/>
+          </p:nvPr>
+        </p:nvSpPr>
+        <p:spPr/>
+      </p:sp>
+    </p:spTree>
+  </p:cSld>
+  <p:clrMapOvr>
+    <a:masterClrMapping/>
+  </p:clrMapOvr>
+</p:notes>
+</file>
+
+<file path=ppt/notesSlides/notesSlide6.xml><?xml version="1.0" encoding="utf-8"?>
+<p:notes xmlns:a="http://schemas.openxmlformats.org/drawingml/2006/main" xmlns:p="http://schemas.openxmlformats.org/presentationml/2006/main" xmlns:r="http://schemas.openxmlformats.org/officeDocument/2006/relationships">
+  <p:cSld>
+    <p:spTree>
+      <p:nvGrpSpPr>
+        <p:cNvPr id="1" name=""/>
+        <p:cNvGrpSpPr/>
+        <p:nvPr/>
+      </p:nvGrpSpPr>
+      <p:grpSpPr>
+        <a:xfrm>
+          <a:off x="0" y="0"/>
+          <a:ext cx="0" cy="0"/>
+          <a:chOff x="0" y="0"/>
+          <a:chExt cx="0" cy="0"/>
+        </a:xfrm>
+      </p:grpSpPr>
+      <p:sp>
+        <p:nvSpPr>
+          <p:cNvPr id="2" name="Slide Image Placeholder 1"/>
+          <p:cNvSpPr>
+            <a:spLocks noGrp="1"/>
+          </p:cNvSpPr>
+          <p:nvPr>
+            <p:ph type="sldImg" idx="2"/>
+          </p:nvPr>
+        </p:nvSpPr>
+        <p:spPr/>
+      </p:sp>
+      <p:sp>
+        <p:nvSpPr>
+          <p:cNvPr id="3" name="Notes Placeholder 2"/>
+          <p:cNvSpPr>
+            <a:spLocks noGrp="1"/>
+          </p:cNvSpPr>
+          <p:nvPr>
+            <p:ph type="body" idx="3" sz="quarter"/>
+          </p:nvPr>
+        </p:nvSpPr>
+        <p:spPr/>
+        <p:txBody>
+          <a:bodyPr/>
+          <a:lstStyle/>
+          <a:p>
+            <a:r>
+              <a:t>A DoD segura é a lista de itens que precisam estar verdes para uma funcionalidade ser considerada 'pronta': threat model atualizado, SAST/SCA sem críticos, testes de authn/authz passando, sem segredos no código, logging de eventos, requisitos ASVS verificados. É o que impede a segurança de 'cair' na pressa do release.</a:t>
+            </a:r>
+          </a:p>
+        </p:txBody>
+      </p:sp>
+      <p:sp>
+        <p:nvSpPr>
+          <p:cNvPr id="4" name="Slide Number Placeholder 3"/>
+          <p:cNvSpPr>
+            <a:spLocks noGrp="1"/>
+          </p:cNvSpPr>
+          <p:nvPr>
+            <p:ph type="sldNum" idx="5" sz="quarter"/>
+          </p:nvPr>
+        </p:nvSpPr>
+        <p:spPr/>
+      </p:sp>
+    </p:spTree>
+  </p:cSld>
+  <p:clrMapOvr>
+    <a:masterClrMapping/>
+  </p:clrMapOvr>
+</p:notes>
+</file>
+
+<file path=ppt/notesSlides/notesSlide7.xml><?xml version="1.0" encoding="utf-8"?>
+<p:notes xmlns:a="http://schemas.openxmlformats.org/drawingml/2006/main" xmlns:p="http://schemas.openxmlformats.org/presentationml/2006/main" xmlns:r="http://schemas.openxmlformats.org/officeDocument/2006/relationships">
+  <p:cSld>
+    <p:spTree>
+      <p:nvGrpSpPr>
+        <p:cNvPr id="1" name=""/>
+        <p:cNvGrpSpPr/>
+        <p:nvPr/>
+      </p:nvGrpSpPr>
+      <p:grpSpPr>
+        <a:xfrm>
+          <a:off x="0" y="0"/>
+          <a:ext cx="0" cy="0"/>
+          <a:chOff x="0" y="0"/>
+          <a:chExt cx="0" cy="0"/>
+        </a:xfrm>
+      </p:grpSpPr>
+      <p:sp>
+        <p:nvSpPr>
+          <p:cNvPr id="2" name="Slide Image Placeholder 1"/>
+          <p:cNvSpPr>
+            <a:spLocks noGrp="1"/>
+          </p:cNvSpPr>
+          <p:nvPr>
+            <p:ph type="sldImg" idx="2"/>
+          </p:nvPr>
+        </p:nvSpPr>
+        <p:spPr/>
+      </p:sp>
+      <p:sp>
+        <p:nvSpPr>
+          <p:cNvPr id="3" name="Notes Placeholder 2"/>
+          <p:cNvSpPr>
+            <a:spLocks noGrp="1"/>
+          </p:cNvSpPr>
+          <p:nvPr>
+            <p:ph type="body" idx="3" sz="quarter"/>
+          </p:nvPr>
+        </p:nvSpPr>
+        <p:spPr/>
+        <p:txBody>
+          <a:bodyPr/>
+          <a:lstStyle/>
+          <a:p>
+            <a:r>
+              <a:t>Nesta fase o grupo consolida tudo das aulas anteriores num catálogo priorizado e define a DoD do projeto. É a ponte entre 'saber o que fazer' e 'começar a corrigir' (Aula 6). Aqui também se escolhe qual(is) controle(s) serão a prova de conceito da Fase 4.</a:t>
+            </a:r>
+          </a:p>
+        </p:txBody>
+      </p:sp>
+      <p:sp>
+        <p:nvSpPr>
+          <p:cNvPr id="4" name="Slide Number Placeholder 3"/>
+          <p:cNvSpPr>
+            <a:spLocks noGrp="1"/>
+          </p:cNvSpPr>
+          <p:nvPr>
+            <p:ph type="sldNum" idx="5" sz="quarter"/>
+          </p:nvPr>
+        </p:nvSpPr>
+        <p:spPr/>
+      </p:sp>
+    </p:spTree>
+  </p:cSld>
+  <p:clrMapOvr>
+    <a:masterClrMapping/>
+  </p:clrMapOvr>
+</p:notes>
 </file>
 
 <file path=ppt/slideLayouts/slideLayout1.xml><?xml version="1.0" encoding="utf-8"?>
@@ -3461,6 +4302,457 @@
         <p:spPr>
           <a:xfrm>
             <a:off x="0" y="0"/>
+            <a:ext cx="12191695" cy="1234440"/>
+          </a:xfrm>
+          <a:prstGeom prst="rect">
+            <a:avLst/>
+          </a:prstGeom>
+          <a:solidFill>
+            <a:srgbClr val="2D7A3D"/>
+          </a:solidFill>
+          <a:ln>
+            <a:noFill/>
+          </a:ln>
+          <a:effectLst/>
+        </p:spPr>
+        <p:style>
+          <a:lnRef idx="1">
+            <a:schemeClr val="accent1"/>
+          </a:lnRef>
+          <a:fillRef idx="3">
+            <a:schemeClr val="accent1"/>
+          </a:fillRef>
+          <a:effectRef idx="2">
+            <a:schemeClr val="accent1"/>
+          </a:effectRef>
+          <a:fontRef idx="minor">
+            <a:schemeClr val="lt1"/>
+          </a:fontRef>
+        </p:style>
+        <p:txBody>
+          <a:bodyPr rtlCol="0" anchor="ctr"/>
+          <a:lstStyle/>
+          <a:p>
+            <a:pPr algn="ctr"/>
+          </a:p>
+        </p:txBody>
+      </p:sp>
+      <p:sp>
+        <p:nvSpPr>
+          <p:cNvPr id="3" name="TextBox 2"/>
+          <p:cNvSpPr txBox="1"/>
+          <p:nvPr/>
+        </p:nvSpPr>
+        <p:spPr>
+          <a:xfrm>
+            <a:off x="457200" y="164592"/>
+            <a:ext cx="11247120" cy="640080"/>
+          </a:xfrm>
+          <a:prstGeom prst="rect">
+            <a:avLst/>
+          </a:prstGeom>
+          <a:noFill/>
+        </p:spPr>
+        <p:txBody>
+          <a:bodyPr wrap="square" anchor="t" lIns="0" rIns="0" tIns="0" bIns="0">
+            <a:spAutoFit/>
+          </a:bodyPr>
+          <a:lstStyle/>
+          <a:p>
+            <a:pPr algn="l">
+              <a:lnSpc>
+                <a:spcPct val="100000"/>
+              </a:lnSpc>
+              <a:spcBef>
+                <a:spcPts val="0"/>
+              </a:spcBef>
+              <a:spcAft>
+                <a:spcPts val="600"/>
+              </a:spcAft>
+            </a:pPr>
+            <a:r>
+              <a:rPr sz="3200" b="1" i="0">
+                <a:solidFill>
+                  <a:srgbClr val="FFFFFF"/>
+                </a:solidFill>
+                <a:latin typeface="Open Sans"/>
+              </a:rPr>
+              <a:t>Entregável da Fase 3</a:t>
+            </a:r>
+          </a:p>
+        </p:txBody>
+      </p:sp>
+      <p:sp>
+        <p:nvSpPr>
+          <p:cNvPr id="4" name="TextBox 3"/>
+          <p:cNvSpPr txBox="1"/>
+          <p:nvPr/>
+        </p:nvSpPr>
+        <p:spPr>
+          <a:xfrm>
+            <a:off x="457200" y="777240"/>
+            <a:ext cx="11247120" cy="365760"/>
+          </a:xfrm>
+          <a:prstGeom prst="rect">
+            <a:avLst/>
+          </a:prstGeom>
+          <a:noFill/>
+        </p:spPr>
+        <p:txBody>
+          <a:bodyPr wrap="square" anchor="t" lIns="0" rIns="0" tIns="0" bIns="0">
+            <a:spAutoFit/>
+          </a:bodyPr>
+          <a:lstStyle/>
+          <a:p>
+            <a:pPr algn="l">
+              <a:lnSpc>
+                <a:spcPct val="100000"/>
+              </a:lnSpc>
+              <a:spcBef>
+                <a:spcPts val="0"/>
+              </a:spcBef>
+              <a:spcAft>
+                <a:spcPts val="600"/>
+              </a:spcAft>
+            </a:pPr>
+            <a:r>
+              <a:rPr sz="1600" b="0" i="1">
+                <a:solidFill>
+                  <a:srgbClr val="E0E8DB"/>
+                </a:solidFill>
+                <a:latin typeface="Open Sans"/>
+              </a:rPr>
+              <a:t>Especificação e priorização</a:t>
+            </a:r>
+          </a:p>
+        </p:txBody>
+      </p:sp>
+      <p:sp>
+        <p:nvSpPr>
+          <p:cNvPr id="5" name="Rounded Rectangle 4"/>
+          <p:cNvSpPr/>
+          <p:nvPr/>
+        </p:nvSpPr>
+        <p:spPr>
+          <a:xfrm>
+            <a:off x="411480" y="1463040"/>
+            <a:ext cx="11384280" cy="5029200"/>
+          </a:xfrm>
+          <a:prstGeom prst="roundRect">
+            <a:avLst/>
+          </a:prstGeom>
+          <a:solidFill>
+            <a:srgbClr val="F5F5F5"/>
+          </a:solidFill>
+          <a:ln w="15875">
+            <a:solidFill>
+              <a:srgbClr val="7CB342"/>
+            </a:solidFill>
+          </a:ln>
+          <a:effectLst/>
+        </p:spPr>
+        <p:style>
+          <a:lnRef idx="1">
+            <a:schemeClr val="accent1"/>
+          </a:lnRef>
+          <a:fillRef idx="3">
+            <a:schemeClr val="accent1"/>
+          </a:fillRef>
+          <a:effectRef idx="2">
+            <a:schemeClr val="accent1"/>
+          </a:effectRef>
+          <a:fontRef idx="minor">
+            <a:schemeClr val="lt1"/>
+          </a:fontRef>
+        </p:style>
+        <p:txBody>
+          <a:bodyPr rtlCol="0" anchor="ctr"/>
+          <a:lstStyle/>
+          <a:p>
+            <a:pPr algn="ctr"/>
+          </a:p>
+        </p:txBody>
+      </p:sp>
+      <p:sp>
+        <p:nvSpPr>
+          <p:cNvPr id="6" name="TextBox 5"/>
+          <p:cNvSpPr txBox="1"/>
+          <p:nvPr/>
+        </p:nvSpPr>
+        <p:spPr>
+          <a:xfrm>
+            <a:off x="868680" y="1783080"/>
+            <a:ext cx="10515600" cy="4572000"/>
+          </a:xfrm>
+          <a:prstGeom prst="rect">
+            <a:avLst/>
+          </a:prstGeom>
+          <a:noFill/>
+        </p:spPr>
+        <p:txBody>
+          <a:bodyPr wrap="square">
+            <a:spAutoFit/>
+          </a:bodyPr>
+          <a:lstStyle/>
+          <a:p>
+            <a:pPr algn="l">
+              <a:lnSpc>
+                <a:spcPct val="110000"/>
+              </a:lnSpc>
+              <a:spcAft>
+                <a:spcPts val="1400"/>
+              </a:spcAft>
+            </a:pPr>
+            <a:r>
+              <a:rPr sz="2000" b="1">
+                <a:solidFill>
+                  <a:srgbClr val="7CB342"/>
+                </a:solidFill>
+                <a:latin typeface="Open Sans"/>
+              </a:rPr>
+              <a:t>▸ </a:t>
+            </a:r>
+            <a:r>
+              <a:rPr sz="1800" b="1">
+                <a:solidFill>
+                  <a:srgbClr val="2D7A3D"/>
+                </a:solidFill>
+                <a:latin typeface="Open Sans"/>
+              </a:rPr>
+              <a:t>Catálogo: </a:t>
+            </a:r>
+            <a:r>
+              <a:rPr sz="1800">
+                <a:solidFill>
+                  <a:srgbClr val="212121"/>
+                </a:solidFill>
+                <a:latin typeface="Open Sans"/>
+              </a:rPr>
+              <a:t>consolide RFS + RGS, identificados como tais.</a:t>
+            </a:r>
+          </a:p>
+          <a:p>
+            <a:pPr algn="l">
+              <a:lnSpc>
+                <a:spcPct val="110000"/>
+              </a:lnSpc>
+              <a:spcAft>
+                <a:spcPts val="1400"/>
+              </a:spcAft>
+            </a:pPr>
+            <a:r>
+              <a:rPr sz="2000" b="1">
+                <a:solidFill>
+                  <a:srgbClr val="7CB342"/>
+                </a:solidFill>
+                <a:latin typeface="Open Sans"/>
+              </a:rPr>
+              <a:t>▸ </a:t>
+            </a:r>
+            <a:r>
+              <a:rPr sz="1800" b="1">
+                <a:solidFill>
+                  <a:srgbClr val="2D7A3D"/>
+                </a:solidFill>
+                <a:latin typeface="Open Sans"/>
+              </a:rPr>
+              <a:t>Representações: </a:t>
+            </a:r>
+            <a:r>
+              <a:rPr sz="1800">
+                <a:solidFill>
+                  <a:srgbClr val="212121"/>
+                </a:solidFill>
+                <a:latin typeface="Open Sans"/>
+              </a:rPr>
+              <a:t>≥2 por requisito P0 (shall/EARS/BDD/ASVS/policy-as-code).</a:t>
+            </a:r>
+          </a:p>
+          <a:p>
+            <a:pPr algn="l">
+              <a:lnSpc>
+                <a:spcPct val="110000"/>
+              </a:lnSpc>
+              <a:spcAft>
+                <a:spcPts val="1400"/>
+              </a:spcAft>
+            </a:pPr>
+            <a:r>
+              <a:rPr sz="2000" b="1">
+                <a:solidFill>
+                  <a:srgbClr val="7CB342"/>
+                </a:solidFill>
+                <a:latin typeface="Open Sans"/>
+              </a:rPr>
+              <a:t>▸ </a:t>
+            </a:r>
+            <a:r>
+              <a:rPr sz="1800" b="1">
+                <a:solidFill>
+                  <a:srgbClr val="2D7A3D"/>
+                </a:solidFill>
+                <a:latin typeface="Open Sans"/>
+              </a:rPr>
+              <a:t>Priorize: </a:t>
+            </a:r>
+            <a:r>
+              <a:rPr sz="1800">
+                <a:solidFill>
+                  <a:srgbClr val="212121"/>
+                </a:solidFill>
+                <a:latin typeface="Open Sans"/>
+              </a:rPr>
+              <a:t>CVSS/DREAD + EPSS/KEV -&gt; P0/P1/P2.</a:t>
+            </a:r>
+          </a:p>
+          <a:p>
+            <a:pPr algn="l">
+              <a:lnSpc>
+                <a:spcPct val="110000"/>
+              </a:lnSpc>
+              <a:spcAft>
+                <a:spcPts val="1400"/>
+              </a:spcAft>
+            </a:pPr>
+            <a:r>
+              <a:rPr sz="2000" b="1">
+                <a:solidFill>
+                  <a:srgbClr val="7CB342"/>
+                </a:solidFill>
+                <a:latin typeface="Open Sans"/>
+              </a:rPr>
+              <a:t>▸ </a:t>
+            </a:r>
+            <a:r>
+              <a:rPr sz="1800" b="1">
+                <a:solidFill>
+                  <a:srgbClr val="2D7A3D"/>
+                </a:solidFill>
+                <a:latin typeface="Open Sans"/>
+              </a:rPr>
+              <a:t>Fail-secure: </a:t>
+            </a:r>
+            <a:r>
+              <a:rPr sz="1800">
+                <a:solidFill>
+                  <a:srgbClr val="212121"/>
+                </a:solidFill>
+                <a:latin typeface="Open Sans"/>
+              </a:rPr>
+              <a:t>defina o comportamento sob falha de cada controle.</a:t>
+            </a:r>
+          </a:p>
+          <a:p>
+            <a:pPr algn="l">
+              <a:lnSpc>
+                <a:spcPct val="110000"/>
+              </a:lnSpc>
+              <a:spcAft>
+                <a:spcPts val="1400"/>
+              </a:spcAft>
+            </a:pPr>
+            <a:r>
+              <a:rPr sz="2000" b="1">
+                <a:solidFill>
+                  <a:srgbClr val="7CB342"/>
+                </a:solidFill>
+                <a:latin typeface="Open Sans"/>
+              </a:rPr>
+              <a:t>▸ </a:t>
+            </a:r>
+            <a:r>
+              <a:rPr sz="1800" b="1">
+                <a:solidFill>
+                  <a:srgbClr val="2D7A3D"/>
+                </a:solidFill>
+                <a:latin typeface="Open Sans"/>
+              </a:rPr>
+              <a:t>DoD segura: </a:t>
+            </a:r>
+            <a:r>
+              <a:rPr sz="1800">
+                <a:solidFill>
+                  <a:srgbClr val="212121"/>
+                </a:solidFill>
+                <a:latin typeface="Open Sans"/>
+              </a:rPr>
+              <a:t>escreva os critérios que fecham uma funcionalidade.</a:t>
+            </a:r>
+          </a:p>
+        </p:txBody>
+      </p:sp>
+      <p:sp>
+        <p:nvSpPr>
+          <p:cNvPr id="7" name="TextBox 6"/>
+          <p:cNvSpPr txBox="1"/>
+          <p:nvPr/>
+        </p:nvSpPr>
+        <p:spPr>
+          <a:xfrm>
+            <a:off x="10972800" y="6446520"/>
+            <a:ext cx="914400" cy="320040"/>
+          </a:xfrm>
+          <a:prstGeom prst="rect">
+            <a:avLst/>
+          </a:prstGeom>
+          <a:noFill/>
+        </p:spPr>
+        <p:txBody>
+          <a:bodyPr wrap="square" anchor="t" lIns="0" rIns="0" tIns="0" bIns="0">
+            <a:spAutoFit/>
+          </a:bodyPr>
+          <a:lstStyle/>
+          <a:p>
+            <a:pPr algn="r">
+              <a:lnSpc>
+                <a:spcPct val="100000"/>
+              </a:lnSpc>
+              <a:spcBef>
+                <a:spcPts val="0"/>
+              </a:spcBef>
+              <a:spcAft>
+                <a:spcPts val="600"/>
+              </a:spcAft>
+            </a:pPr>
+            <a:r>
+              <a:rPr sz="1100" b="0" i="0">
+                <a:solidFill>
+                  <a:srgbClr val="616161"/>
+                </a:solidFill>
+                <a:latin typeface="Open Sans"/>
+              </a:rPr>
+              <a:t>10</a:t>
+            </a:r>
+          </a:p>
+        </p:txBody>
+      </p:sp>
+    </p:spTree>
+  </p:cSld>
+  <p:clrMapOvr>
+    <a:masterClrMapping/>
+  </p:clrMapOvr>
+</p:sld>
+</file>
+
+<file path=ppt/slides/slide11.xml><?xml version="1.0" encoding="utf-8"?>
+<p:sld xmlns:a="http://schemas.openxmlformats.org/drawingml/2006/main" xmlns:p="http://schemas.openxmlformats.org/presentationml/2006/main" xmlns:r="http://schemas.openxmlformats.org/officeDocument/2006/relationships">
+  <p:cSld>
+    <p:spTree>
+      <p:nvGrpSpPr>
+        <p:cNvPr id="1" name=""/>
+        <p:cNvGrpSpPr/>
+        <p:nvPr/>
+      </p:nvGrpSpPr>
+      <p:grpSpPr/>
+      <p:sp>
+        <p:nvSpPr>
+          <p:cNvPr id="2" name="Rectangle 1"/>
+          <p:cNvSpPr/>
+          <p:nvPr/>
+        </p:nvSpPr>
+        <p:spPr>
+          <a:xfrm>
+            <a:off x="0" y="0"/>
             <a:ext cx="12191695" cy="6858000"/>
           </a:xfrm>
           <a:prstGeom prst="rect">
@@ -4132,7 +5424,7 @@
                 </a:solidFill>
                 <a:latin typeface="Open Sans"/>
               </a:rPr>
-              <a:t>6 dos 8 princípios atemporais</a:t>
+              <a:t>6 dos 8 princípios que fundamentam o design seguro</a:t>
             </a:r>
           </a:p>
         </p:txBody>
@@ -4357,7 +5649,7 @@
                 </a:solidFill>
                 <a:latin typeface="Open Sans"/>
               </a:rPr>
-              <a:t>padrão = negar</a:t>
+              <a:t>o padrão é NEGAR; permissão é decisão explícita</a:t>
             </a:r>
           </a:p>
         </p:txBody>
@@ -4582,7 +5874,7 @@
                 </a:solidFill>
                 <a:latin typeface="Open Sans"/>
               </a:rPr>
-              <a:t>verificar toda requisição</a:t>
+              <a:t>toda requisição é verificada; sem cache de autorização</a:t>
             </a:r>
           </a:p>
         </p:txBody>
@@ -4807,7 +6099,7 @@
                 </a:solidFill>
                 <a:latin typeface="Open Sans"/>
               </a:rPr>
-              <a:t>o mínimo necessário</a:t>
+              <a:t>cada identidade só com o mínimo necessário</a:t>
             </a:r>
           </a:p>
         </p:txBody>
@@ -5032,7 +6324,7 @@
                 </a:solidFill>
                 <a:latin typeface="Open Sans"/>
               </a:rPr>
-              <a:t>simples = menos bugs</a:t>
+              <a:t>design simples e pequeno = menos bugs</a:t>
             </a:r>
           </a:p>
         </p:txBody>
@@ -5257,7 +6549,7 @@
                 </a:solidFill>
                 <a:latin typeface="Open Sans"/>
               </a:rPr>
-              <a:t>não depende de obscuridade</a:t>
+              <a:t>segurança não depende de obscuridade (Kerckhoffs)</a:t>
             </a:r>
           </a:p>
         </p:txBody>
@@ -5482,7 +6774,7 @@
                 </a:solidFill>
                 <a:latin typeface="Open Sans"/>
               </a:rPr>
-              <a:t>duas chaves</a:t>
+              <a:t>ações críticas exigem mais de uma condição</a:t>
             </a:r>
           </a:p>
         </p:txBody>
@@ -5949,7 +7241,7 @@
                 </a:solidFill>
                 <a:latin typeface="Open Sans"/>
               </a:rPr>
-              <a:t>Firewall default-deny.</a:t>
+              <a:t>Firewall com regra default-deny.</a:t>
             </a:r>
           </a:p>
         </p:txBody>
@@ -6038,7 +7330,7 @@
                 </a:solidFill>
                 <a:latin typeface="Open Sans"/>
               </a:rPr>
-              <a:t>Fail Safe — 'preservar'</a:t>
+              <a:t>Fail Safe — 'preservar vidas'</a:t>
             </a:r>
           </a:p>
         </p:txBody>
@@ -6135,7 +7427,7 @@
                 </a:solidFill>
                 <a:latin typeface="Open Sans"/>
               </a:rPr>
-              <a:t>Sistema de incêndio (porta abre).</a:t>
+              <a:t>Sistema de incêndio (a porta abre).</a:t>
             </a:r>
           </a:p>
           <a:p>
@@ -6191,7 +7483,7 @@
                 </a:solidFill>
                 <a:latin typeface="Open Sans"/>
               </a:rPr>
-              <a:t>Semáforo (amarelo piscante).</a:t>
+              <a:t>Semáforo (vai a amarelo piscante).</a:t>
             </a:r>
           </a:p>
           <a:p>
@@ -6219,7 +7511,7 @@
                 </a:solidFill>
                 <a:latin typeface="Open Sans"/>
               </a:rPr>
-              <a:t>Elevador desce ao térreo.</a:t>
+              <a:t>Elevador (desce ao térreo).</a:t>
             </a:r>
           </a:p>
         </p:txBody>
@@ -6793,7 +8085,7 @@
                 </a:solidFill>
                 <a:latin typeface="Open Sans"/>
               </a:rPr>
-              <a:t>pontua vulnerabilidade 0–10</a:t>
+              <a:t>pontua a vulnerabilidade de 0 a 10 por vetor</a:t>
             </a:r>
           </a:p>
         </p:txBody>
@@ -6929,7 +8221,7 @@
                 </a:solidFill>
                 <a:latin typeface="Open Sans"/>
               </a:rPr>
-              <a:t>Damage, Reproducibility, Exploitability...</a:t>
+              <a:t>Damage, Reproducibility, Exploitability, Affected, Discoverability</a:t>
             </a:r>
           </a:p>
         </p:txBody>
@@ -7065,7 +8357,7 @@
                 </a:solidFill>
                 <a:latin typeface="Open Sans"/>
               </a:rPr>
-              <a:t>probabilidade de exploração em 30 dias</a:t>
+              <a:t>probabilidade de ser explorada em 30 dias</a:t>
             </a:r>
           </a:p>
         </p:txBody>
@@ -7201,7 +8493,7 @@
                 </a:solidFill>
                 <a:latin typeface="Open Sans"/>
               </a:rPr>
-              <a:t>já explorado no mundo real -&gt; sobe nível</a:t>
+              <a:t>já explorada no mundo real -&gt; sobe um nível</a:t>
             </a:r>
           </a:p>
         </p:txBody>
@@ -7353,7 +8645,7 @@
                 </a:solidFill>
                 <a:latin typeface="Open Sans"/>
               </a:rPr>
-              <a:t>Requisito vira portão de qualidade</a:t>
+              <a:t>Representações de um requisito</a:t>
             </a:r>
           </a:p>
         </p:txBody>
@@ -7398,165 +8690,32 @@
                 </a:solidFill>
                 <a:latin typeface="Open Sans"/>
               </a:rPr>
-              <a:t>Aceite + Definition of Done</a:t>
-            </a:r>
-          </a:p>
-        </p:txBody>
-      </p:sp>
-      <p:sp>
-        <p:nvSpPr>
-          <p:cNvPr id="5" name="TextBox 4"/>
-          <p:cNvSpPr txBox="1"/>
-          <p:nvPr/>
-        </p:nvSpPr>
-        <p:spPr>
-          <a:xfrm>
-            <a:off x="548640" y="1737360"/>
-            <a:ext cx="1371600" cy="1371600"/>
-          </a:xfrm>
-          <a:prstGeom prst="rect">
-            <a:avLst/>
-          </a:prstGeom>
-          <a:noFill/>
-        </p:spPr>
-        <p:txBody>
-          <a:bodyPr wrap="square" anchor="t" lIns="0" rIns="0" tIns="0" bIns="0">
-            <a:spAutoFit/>
-          </a:bodyPr>
-          <a:lstStyle/>
-          <a:p>
-            <a:pPr algn="l">
-              <a:lnSpc>
-                <a:spcPct val="100000"/>
-              </a:lnSpc>
-              <a:spcBef>
-                <a:spcPts val="0"/>
-              </a:spcBef>
-              <a:spcAft>
-                <a:spcPts val="600"/>
-              </a:spcAft>
-            </a:pPr>
-            <a:r>
-              <a:rPr sz="13000" b="1" i="0">
-                <a:solidFill>
-                  <a:srgbClr val="7CB342"/>
-                </a:solidFill>
-                <a:latin typeface="Open Sans"/>
-              </a:rPr>
-              <a:t>“</a:t>
-            </a:r>
-          </a:p>
-        </p:txBody>
-      </p:sp>
-      <p:sp>
-        <p:nvSpPr>
-          <p:cNvPr id="6" name="TextBox 5"/>
-          <p:cNvSpPr txBox="1"/>
-          <p:nvPr/>
-        </p:nvSpPr>
-        <p:spPr>
-          <a:xfrm>
-            <a:off x="1828800" y="2194560"/>
-            <a:ext cx="9601200" cy="2286000"/>
-          </a:xfrm>
-          <a:prstGeom prst="rect">
-            <a:avLst/>
-          </a:prstGeom>
-          <a:noFill/>
-        </p:spPr>
-        <p:txBody>
-          <a:bodyPr wrap="square" anchor="t" lIns="0" rIns="0" tIns="0" bIns="0">
-            <a:spAutoFit/>
-          </a:bodyPr>
-          <a:lstStyle/>
-          <a:p>
-            <a:pPr algn="l">
-              <a:lnSpc>
-                <a:spcPct val="115000"/>
-              </a:lnSpc>
-              <a:spcBef>
-                <a:spcPts val="0"/>
-              </a:spcBef>
-              <a:spcAft>
-                <a:spcPts val="600"/>
-              </a:spcAft>
-            </a:pPr>
-            <a:r>
-              <a:rPr sz="3000" b="0" i="1">
-                <a:solidFill>
-                  <a:srgbClr val="2D7A3D"/>
-                </a:solidFill>
-                <a:latin typeface="Open Sans"/>
-              </a:rPr>
-              <a:t>Requisito + critério de aceite (BDD) + item na Definition of Done = segurança que não se 'esquece' no release.</a:t>
-            </a:r>
-          </a:p>
-        </p:txBody>
-      </p:sp>
-      <p:sp>
-        <p:nvSpPr>
-          <p:cNvPr id="7" name="TextBox 6"/>
-          <p:cNvSpPr txBox="1"/>
-          <p:nvPr/>
-        </p:nvSpPr>
-        <p:spPr>
-          <a:xfrm>
-            <a:off x="1828800" y="4937760"/>
-            <a:ext cx="9601200" cy="548640"/>
-          </a:xfrm>
-          <a:prstGeom prst="rect">
-            <a:avLst/>
-          </a:prstGeom>
-          <a:noFill/>
-        </p:spPr>
-        <p:txBody>
-          <a:bodyPr wrap="square" anchor="t" lIns="0" rIns="0" tIns="0" bIns="0">
-            <a:spAutoFit/>
-          </a:bodyPr>
-          <a:lstStyle/>
-          <a:p>
-            <a:pPr algn="l">
-              <a:lnSpc>
-                <a:spcPct val="100000"/>
-              </a:lnSpc>
-              <a:spcBef>
-                <a:spcPts val="0"/>
-              </a:spcBef>
-              <a:spcAft>
-                <a:spcPts val="600"/>
-              </a:spcAft>
-            </a:pPr>
-            <a:r>
-              <a:rPr sz="1800" b="1" i="0">
-                <a:solidFill>
-                  <a:srgbClr val="616161"/>
-                </a:solidFill>
-                <a:latin typeface="Open Sans"/>
-              </a:rPr>
-              <a:t>Da especificação à verificação</a:t>
-            </a:r>
-          </a:p>
-        </p:txBody>
-      </p:sp>
-      <p:sp>
-        <p:nvSpPr>
-          <p:cNvPr id="8" name="Rectangle 7"/>
+              <a:t>A mesma exigência, várias formas</a:t>
+            </a:r>
+          </a:p>
+        </p:txBody>
+      </p:sp>
+      <p:sp>
+        <p:nvSpPr>
+          <p:cNvPr id="5" name="Rounded Rectangle 4"/>
           <p:cNvSpPr/>
           <p:nvPr/>
         </p:nvSpPr>
         <p:spPr>
           <a:xfrm>
-            <a:off x="1828800" y="5532120"/>
-            <a:ext cx="1828800" cy="25400"/>
-          </a:xfrm>
-          <a:prstGeom prst="rect">
+            <a:off x="411480" y="1463040"/>
+            <a:ext cx="11384280" cy="5029200"/>
+          </a:xfrm>
+          <a:prstGeom prst="roundRect">
             <a:avLst/>
           </a:prstGeom>
           <a:solidFill>
-            <a:srgbClr val="7CB342"/>
+            <a:srgbClr val="F5F5F5"/>
           </a:solidFill>
-          <a:ln>
-            <a:noFill/>
+          <a:ln w="15875">
+            <a:solidFill>
+              <a:srgbClr val="7CB342"/>
+            </a:solidFill>
           </a:ln>
           <a:effectLst/>
         </p:spPr>
@@ -7584,7 +8743,215 @@
       </p:sp>
       <p:sp>
         <p:nvSpPr>
-          <p:cNvPr id="9" name="TextBox 8"/>
+          <p:cNvPr id="6" name="TextBox 5"/>
+          <p:cNvSpPr txBox="1"/>
+          <p:nvPr/>
+        </p:nvSpPr>
+        <p:spPr>
+          <a:xfrm>
+            <a:off x="868680" y="1783080"/>
+            <a:ext cx="10515600" cy="4572000"/>
+          </a:xfrm>
+          <a:prstGeom prst="rect">
+            <a:avLst/>
+          </a:prstGeom>
+          <a:noFill/>
+        </p:spPr>
+        <p:txBody>
+          <a:bodyPr wrap="square">
+            <a:spAutoFit/>
+          </a:bodyPr>
+          <a:lstStyle/>
+          <a:p>
+            <a:pPr algn="l">
+              <a:lnSpc>
+                <a:spcPct val="110000"/>
+              </a:lnSpc>
+              <a:spcAft>
+                <a:spcPts val="1400"/>
+              </a:spcAft>
+            </a:pPr>
+            <a:r>
+              <a:rPr sz="2000" b="1">
+                <a:solidFill>
+                  <a:srgbClr val="7CB342"/>
+                </a:solidFill>
+                <a:latin typeface="Open Sans"/>
+              </a:rPr>
+              <a:t>▸ </a:t>
+            </a:r>
+            <a:r>
+              <a:rPr sz="1800" b="1">
+                <a:solidFill>
+                  <a:srgbClr val="2D7A3D"/>
+                </a:solidFill>
+                <a:latin typeface="Open Sans"/>
+              </a:rPr>
+              <a:t>Declaração (shall): </a:t>
+            </a:r>
+            <a:r>
+              <a:rPr sz="1800">
+                <a:solidFill>
+                  <a:srgbClr val="212121"/>
+                </a:solidFill>
+                <a:latin typeface="Open Sans"/>
+              </a:rPr>
+              <a:t>'O sistema deve cifrar dados de saúde com AES-256.'</a:t>
+            </a:r>
+          </a:p>
+          <a:p>
+            <a:pPr algn="l">
+              <a:lnSpc>
+                <a:spcPct val="110000"/>
+              </a:lnSpc>
+              <a:spcAft>
+                <a:spcPts val="1400"/>
+              </a:spcAft>
+            </a:pPr>
+            <a:r>
+              <a:rPr sz="2000" b="1">
+                <a:solidFill>
+                  <a:srgbClr val="7CB342"/>
+                </a:solidFill>
+                <a:latin typeface="Open Sans"/>
+              </a:rPr>
+              <a:t>▸ </a:t>
+            </a:r>
+            <a:r>
+              <a:rPr sz="1800" b="1">
+                <a:solidFill>
+                  <a:srgbClr val="2D7A3D"/>
+                </a:solidFill>
+                <a:latin typeface="Open Sans"/>
+              </a:rPr>
+              <a:t>EARS: </a:t>
+            </a:r>
+            <a:r>
+              <a:rPr sz="1800">
+                <a:solidFill>
+                  <a:srgbClr val="212121"/>
+                </a:solidFill>
+                <a:latin typeface="Open Sans"/>
+              </a:rPr>
+              <a:t>'SE 5 falhas em 15 min, ENTÃO bloquear a conta.'</a:t>
+            </a:r>
+          </a:p>
+          <a:p>
+            <a:pPr algn="l">
+              <a:lnSpc>
+                <a:spcPct val="110000"/>
+              </a:lnSpc>
+              <a:spcAft>
+                <a:spcPts val="1400"/>
+              </a:spcAft>
+            </a:pPr>
+            <a:r>
+              <a:rPr sz="2000" b="1">
+                <a:solidFill>
+                  <a:srgbClr val="7CB342"/>
+                </a:solidFill>
+                <a:latin typeface="Open Sans"/>
+              </a:rPr>
+              <a:t>▸ </a:t>
+            </a:r>
+            <a:r>
+              <a:rPr sz="1800" b="1">
+                <a:solidFill>
+                  <a:srgbClr val="2D7A3D"/>
+                </a:solidFill>
+                <a:latin typeface="Open Sans"/>
+              </a:rPr>
+              <a:t>BDD/Gherkin: </a:t>
+            </a:r>
+            <a:r>
+              <a:rPr sz="1800">
+                <a:solidFill>
+                  <a:srgbClr val="212121"/>
+                </a:solidFill>
+                <a:latin typeface="Open Sans"/>
+              </a:rPr>
+              <a:t>'Dado A autenticado, Quando GET /exames/{id_B}, Então 403.'</a:t>
+            </a:r>
+          </a:p>
+          <a:p>
+            <a:pPr algn="l">
+              <a:lnSpc>
+                <a:spcPct val="110000"/>
+              </a:lnSpc>
+              <a:spcAft>
+                <a:spcPts val="1400"/>
+              </a:spcAft>
+            </a:pPr>
+            <a:r>
+              <a:rPr sz="2000" b="1">
+                <a:solidFill>
+                  <a:srgbClr val="7CB342"/>
+                </a:solidFill>
+                <a:latin typeface="Open Sans"/>
+              </a:rPr>
+              <a:t>▸ </a:t>
+            </a:r>
+            <a:r>
+              <a:rPr sz="1800" b="1">
+                <a:solidFill>
+                  <a:srgbClr val="2D7A3D"/>
+                </a:solidFill>
+                <a:latin typeface="Open Sans"/>
+              </a:rPr>
+              <a:t>Item de catálogo: </a:t>
+            </a:r>
+            <a:r>
+              <a:rPr sz="1800">
+                <a:solidFill>
+                  <a:srgbClr val="212121"/>
+                </a:solidFill>
+                <a:latin typeface="Open Sans"/>
+              </a:rPr>
+              <a:t>REQ-AUTH-07 ≡ OWASP ASVS V2.1.1.</a:t>
+            </a:r>
+          </a:p>
+          <a:p>
+            <a:pPr algn="l">
+              <a:lnSpc>
+                <a:spcPct val="110000"/>
+              </a:lnSpc>
+              <a:spcAft>
+                <a:spcPts val="1400"/>
+              </a:spcAft>
+            </a:pPr>
+            <a:r>
+              <a:rPr sz="2000" b="1">
+                <a:solidFill>
+                  <a:srgbClr val="7CB342"/>
+                </a:solidFill>
+                <a:latin typeface="Open Sans"/>
+              </a:rPr>
+              <a:t>▸ </a:t>
+            </a:r>
+            <a:r>
+              <a:rPr sz="1800" b="1">
+                <a:solidFill>
+                  <a:srgbClr val="2D7A3D"/>
+                </a:solidFill>
+                <a:latin typeface="Open Sans"/>
+              </a:rPr>
+              <a:t>Policy as code: </a:t>
+            </a:r>
+            <a:r>
+              <a:rPr sz="1800">
+                <a:solidFill>
+                  <a:srgbClr val="212121"/>
+                </a:solidFill>
+                <a:latin typeface="Open Sans"/>
+              </a:rPr>
+              <a:t>deny[msg] { input.owner != input.user_id }.</a:t>
+            </a:r>
+          </a:p>
+        </p:txBody>
+      </p:sp>
+      <p:sp>
+        <p:nvSpPr>
+          <p:cNvPr id="7" name="TextBox 6"/>
           <p:cNvSpPr txBox="1"/>
           <p:nvPr/>
         </p:nvSpPr>
@@ -7654,13 +9021,13 @@
         <p:spPr>
           <a:xfrm>
             <a:off x="0" y="0"/>
-            <a:ext cx="12191695" cy="6858000"/>
+            <a:ext cx="12191695" cy="1234440"/>
           </a:xfrm>
           <a:prstGeom prst="rect">
             <a:avLst/>
           </a:prstGeom>
           <a:solidFill>
-            <a:srgbClr val="1F5232"/>
+            <a:srgbClr val="2D7A3D"/>
           </a:solidFill>
           <a:ln>
             <a:noFill/>
@@ -7697,8 +9064,8 @@
         </p:nvSpPr>
         <p:spPr>
           <a:xfrm>
-            <a:off x="457200" y="2194560"/>
-            <a:ext cx="11247120" cy="548640"/>
+            <a:off x="457200" y="164592"/>
+            <a:ext cx="11247120" cy="640080"/>
           </a:xfrm>
           <a:prstGeom prst="rect">
             <a:avLst/>
@@ -7711,7 +9078,7 @@
           </a:bodyPr>
           <a:lstStyle/>
           <a:p>
-            <a:pPr algn="ctr">
+            <a:pPr algn="l">
               <a:lnSpc>
                 <a:spcPct val="100000"/>
               </a:lnSpc>
@@ -7723,13 +9090,13 @@
               </a:spcAft>
             </a:pPr>
             <a:r>
-              <a:rPr sz="2000" b="1" i="0">
-                <a:solidFill>
-                  <a:srgbClr val="7CB342"/>
-                </a:solidFill>
-                <a:latin typeface="Open Sans"/>
-              </a:rPr>
-              <a:t>PARTE 3</a:t>
+              <a:rPr sz="3200" b="1" i="0">
+                <a:solidFill>
+                  <a:srgbClr val="FFFFFF"/>
+                </a:solidFill>
+                <a:latin typeface="Open Sans"/>
+              </a:rPr>
+              <a:t>Definition of Done segura</a:t>
             </a:r>
           </a:p>
         </p:txBody>
@@ -7742,8 +9109,8 @@
         </p:nvSpPr>
         <p:spPr>
           <a:xfrm>
-            <a:off x="457200" y="2834640"/>
-            <a:ext cx="11247120" cy="1280160"/>
+            <a:off x="457200" y="777240"/>
+            <a:ext cx="11247120" cy="365760"/>
           </a:xfrm>
           <a:prstGeom prst="rect">
             <a:avLst/>
@@ -7756,7 +9123,7 @@
           </a:bodyPr>
           <a:lstStyle/>
           <a:p>
-            <a:pPr algn="ctr">
+            <a:pPr algn="l">
               <a:lnSpc>
                 <a:spcPct val="100000"/>
               </a:lnSpc>
@@ -7768,13 +9135,13 @@
               </a:spcAft>
             </a:pPr>
             <a:r>
-              <a:rPr sz="6000" b="1" i="0">
-                <a:solidFill>
-                  <a:srgbClr val="FFFFFF"/>
-                </a:solidFill>
-                <a:latin typeface="Open Sans"/>
-              </a:rPr>
-              <a:t>No VidaPlus</a:t>
+              <a:rPr sz="1600" b="0" i="1">
+                <a:solidFill>
+                  <a:srgbClr val="E0E8DB"/>
+                </a:solidFill>
+                <a:latin typeface="Open Sans"/>
+              </a:rPr>
+              <a:t>Onde o requisito vira portão de qualidade</a:t>
             </a:r>
           </a:p>
         </p:txBody>
@@ -7787,8 +9154,8 @@
         </p:nvSpPr>
         <p:spPr>
           <a:xfrm>
-            <a:off x="457200" y="4297680"/>
-            <a:ext cx="11247120" cy="457200"/>
+            <a:off x="548640" y="1737360"/>
+            <a:ext cx="1371600" cy="1371600"/>
           </a:xfrm>
           <a:prstGeom prst="rect">
             <a:avLst/>
@@ -7801,7 +9168,7 @@
           </a:bodyPr>
           <a:lstStyle/>
           <a:p>
-            <a:pPr algn="ctr">
+            <a:pPr algn="l">
               <a:lnSpc>
                 <a:spcPct val="100000"/>
               </a:lnSpc>
@@ -7813,26 +9180,116 @@
               </a:spcAft>
             </a:pPr>
             <a:r>
-              <a:rPr sz="2200" b="0" i="1">
-                <a:solidFill>
-                  <a:srgbClr val="CCD7C0"/>
-                </a:solidFill>
-                <a:latin typeface="Open Sans"/>
-              </a:rPr>
-              <a:t>A etapa desta semana (Fase 3)</a:t>
-            </a:r>
-          </a:p>
-        </p:txBody>
-      </p:sp>
-      <p:sp>
-        <p:nvSpPr>
-          <p:cNvPr id="6" name="Rectangle 5"/>
+              <a:rPr sz="13000" b="1" i="0">
+                <a:solidFill>
+                  <a:srgbClr val="7CB342"/>
+                </a:solidFill>
+                <a:latin typeface="Open Sans"/>
+              </a:rPr>
+              <a:t>“</a:t>
+            </a:r>
+          </a:p>
+        </p:txBody>
+      </p:sp>
+      <p:sp>
+        <p:nvSpPr>
+          <p:cNvPr id="6" name="TextBox 5"/>
+          <p:cNvSpPr txBox="1"/>
+          <p:nvPr/>
+        </p:nvSpPr>
+        <p:spPr>
+          <a:xfrm>
+            <a:off x="1828800" y="2194560"/>
+            <a:ext cx="9601200" cy="2286000"/>
+          </a:xfrm>
+          <a:prstGeom prst="rect">
+            <a:avLst/>
+          </a:prstGeom>
+          <a:noFill/>
+        </p:spPr>
+        <p:txBody>
+          <a:bodyPr wrap="square" anchor="t" lIns="0" rIns="0" tIns="0" bIns="0">
+            <a:spAutoFit/>
+          </a:bodyPr>
+          <a:lstStyle/>
+          <a:p>
+            <a:pPr algn="l">
+              <a:lnSpc>
+                <a:spcPct val="115000"/>
+              </a:lnSpc>
+              <a:spcBef>
+                <a:spcPts val="0"/>
+              </a:spcBef>
+              <a:spcAft>
+                <a:spcPts val="600"/>
+              </a:spcAft>
+            </a:pPr>
+            <a:r>
+              <a:rPr sz="3000" b="0" i="1">
+                <a:solidFill>
+                  <a:srgbClr val="2D7A3D"/>
+                </a:solidFill>
+                <a:latin typeface="Open Sans"/>
+              </a:rPr>
+              <a:t>Requisito + critério de aceite (BDD) + item na Definition of Done = segurança que não se 'esquece' no release.</a:t>
+            </a:r>
+          </a:p>
+        </p:txBody>
+      </p:sp>
+      <p:sp>
+        <p:nvSpPr>
+          <p:cNvPr id="7" name="TextBox 6"/>
+          <p:cNvSpPr txBox="1"/>
+          <p:nvPr/>
+        </p:nvSpPr>
+        <p:spPr>
+          <a:xfrm>
+            <a:off x="1828800" y="4937760"/>
+            <a:ext cx="9601200" cy="548640"/>
+          </a:xfrm>
+          <a:prstGeom prst="rect">
+            <a:avLst/>
+          </a:prstGeom>
+          <a:noFill/>
+        </p:spPr>
+        <p:txBody>
+          <a:bodyPr wrap="square" anchor="t" lIns="0" rIns="0" tIns="0" bIns="0">
+            <a:spAutoFit/>
+          </a:bodyPr>
+          <a:lstStyle/>
+          <a:p>
+            <a:pPr algn="l">
+              <a:lnSpc>
+                <a:spcPct val="100000"/>
+              </a:lnSpc>
+              <a:spcBef>
+                <a:spcPts val="0"/>
+              </a:spcBef>
+              <a:spcAft>
+                <a:spcPts val="600"/>
+              </a:spcAft>
+            </a:pPr>
+            <a:r>
+              <a:rPr sz="1800" b="1" i="0">
+                <a:solidFill>
+                  <a:srgbClr val="616161"/>
+                </a:solidFill>
+                <a:latin typeface="Open Sans"/>
+              </a:rPr>
+              <a:t>Da especificação à verificação</a:t>
+            </a:r>
+          </a:p>
+        </p:txBody>
+      </p:sp>
+      <p:sp>
+        <p:nvSpPr>
+          <p:cNvPr id="8" name="Rectangle 7"/>
           <p:cNvSpPr/>
           <p:nvPr/>
         </p:nvSpPr>
         <p:spPr>
           <a:xfrm>
-            <a:off x="5184648" y="4983480"/>
+            <a:off x="1828800" y="5532120"/>
             <a:ext cx="1828800" cy="25400"/>
           </a:xfrm>
           <a:prstGeom prst="rect">
@@ -7865,6 +9322,51 @@
           <a:lstStyle/>
           <a:p>
             <a:pPr algn="ctr"/>
+          </a:p>
+        </p:txBody>
+      </p:sp>
+      <p:sp>
+        <p:nvSpPr>
+          <p:cNvPr id="9" name="TextBox 8"/>
+          <p:cNvSpPr txBox="1"/>
+          <p:nvPr/>
+        </p:nvSpPr>
+        <p:spPr>
+          <a:xfrm>
+            <a:off x="10972800" y="6446520"/>
+            <a:ext cx="914400" cy="320040"/>
+          </a:xfrm>
+          <a:prstGeom prst="rect">
+            <a:avLst/>
+          </a:prstGeom>
+          <a:noFill/>
+        </p:spPr>
+        <p:txBody>
+          <a:bodyPr wrap="square" anchor="t" lIns="0" rIns="0" tIns="0" bIns="0">
+            <a:spAutoFit/>
+          </a:bodyPr>
+          <a:lstStyle/>
+          <a:p>
+            <a:pPr algn="r">
+              <a:lnSpc>
+                <a:spcPct val="100000"/>
+              </a:lnSpc>
+              <a:spcBef>
+                <a:spcPts val="0"/>
+              </a:spcBef>
+              <a:spcAft>
+                <a:spcPts val="600"/>
+              </a:spcAft>
+            </a:pPr>
+            <a:r>
+              <a:rPr sz="1100" b="0" i="0">
+                <a:solidFill>
+                  <a:srgbClr val="616161"/>
+                </a:solidFill>
+                <a:latin typeface="Open Sans"/>
+              </a:rPr>
+              <a:t>8</a:t>
+            </a:r>
           </a:p>
         </p:txBody>
       </p:sp>
@@ -7895,13 +9397,13 @@
         <p:spPr>
           <a:xfrm>
             <a:off x="0" y="0"/>
-            <a:ext cx="12191695" cy="1234440"/>
+            <a:ext cx="12191695" cy="6858000"/>
           </a:xfrm>
           <a:prstGeom prst="rect">
             <a:avLst/>
           </a:prstGeom>
           <a:solidFill>
-            <a:srgbClr val="2D7A3D"/>
+            <a:srgbClr val="1F5232"/>
           </a:solidFill>
           <a:ln>
             <a:noFill/>
@@ -7938,8 +9440,8 @@
         </p:nvSpPr>
         <p:spPr>
           <a:xfrm>
-            <a:off x="457200" y="164592"/>
-            <a:ext cx="11247120" cy="640080"/>
+            <a:off x="457200" y="2194560"/>
+            <a:ext cx="11247120" cy="548640"/>
           </a:xfrm>
           <a:prstGeom prst="rect">
             <a:avLst/>
@@ -7952,7 +9454,7 @@
           </a:bodyPr>
           <a:lstStyle/>
           <a:p>
-            <a:pPr algn="l">
+            <a:pPr algn="ctr">
               <a:lnSpc>
                 <a:spcPct val="100000"/>
               </a:lnSpc>
@@ -7964,13 +9466,13 @@
               </a:spcAft>
             </a:pPr>
             <a:r>
-              <a:rPr sz="3200" b="1" i="0">
-                <a:solidFill>
-                  <a:srgbClr val="FFFFFF"/>
-                </a:solidFill>
-                <a:latin typeface="Open Sans"/>
-              </a:rPr>
-              <a:t>Entregável da Fase 3</a:t>
+              <a:rPr sz="2000" b="1" i="0">
+                <a:solidFill>
+                  <a:srgbClr val="7CB342"/>
+                </a:solidFill>
+                <a:latin typeface="Open Sans"/>
+              </a:rPr>
+              <a:t>PARTE 3</a:t>
             </a:r>
           </a:p>
         </p:txBody>
@@ -7983,8 +9485,8 @@
         </p:nvSpPr>
         <p:spPr>
           <a:xfrm>
-            <a:off x="457200" y="777240"/>
-            <a:ext cx="11247120" cy="365760"/>
+            <a:off x="457200" y="2834640"/>
+            <a:ext cx="11247120" cy="1280160"/>
           </a:xfrm>
           <a:prstGeom prst="rect">
             <a:avLst/>
@@ -7997,7 +9499,7 @@
           </a:bodyPr>
           <a:lstStyle/>
           <a:p>
-            <a:pPr algn="l">
+            <a:pPr algn="ctr">
               <a:lnSpc>
                 <a:spcPct val="100000"/>
               </a:lnSpc>
@@ -8009,281 +9511,27 @@
               </a:spcAft>
             </a:pPr>
             <a:r>
-              <a:rPr sz="1600" b="0" i="1">
-                <a:solidFill>
-                  <a:srgbClr val="E0E8DB"/>
-                </a:solidFill>
-                <a:latin typeface="Open Sans"/>
-              </a:rPr>
-              <a:t>Especificação e priorização</a:t>
-            </a:r>
-          </a:p>
-        </p:txBody>
-      </p:sp>
-      <p:sp>
-        <p:nvSpPr>
-          <p:cNvPr id="5" name="Rounded Rectangle 4"/>
-          <p:cNvSpPr/>
-          <p:nvPr/>
-        </p:nvSpPr>
-        <p:spPr>
-          <a:xfrm>
-            <a:off x="411480" y="1463040"/>
-            <a:ext cx="11384280" cy="5029200"/>
-          </a:xfrm>
-          <a:prstGeom prst="roundRect">
-            <a:avLst/>
-          </a:prstGeom>
-          <a:solidFill>
-            <a:srgbClr val="F5F5F5"/>
-          </a:solidFill>
-          <a:ln w="15875">
-            <a:solidFill>
-              <a:srgbClr val="7CB342"/>
-            </a:solidFill>
-          </a:ln>
-          <a:effectLst/>
-        </p:spPr>
-        <p:style>
-          <a:lnRef idx="1">
-            <a:schemeClr val="accent1"/>
-          </a:lnRef>
-          <a:fillRef idx="3">
-            <a:schemeClr val="accent1"/>
-          </a:fillRef>
-          <a:effectRef idx="2">
-            <a:schemeClr val="accent1"/>
-          </a:effectRef>
-          <a:fontRef idx="minor">
-            <a:schemeClr val="lt1"/>
-          </a:fontRef>
-        </p:style>
-        <p:txBody>
-          <a:bodyPr rtlCol="0" anchor="ctr"/>
-          <a:lstStyle/>
-          <a:p>
-            <a:pPr algn="ctr"/>
-          </a:p>
-        </p:txBody>
-      </p:sp>
-      <p:sp>
-        <p:nvSpPr>
-          <p:cNvPr id="6" name="TextBox 5"/>
+              <a:rPr sz="6000" b="1" i="0">
+                <a:solidFill>
+                  <a:srgbClr val="FFFFFF"/>
+                </a:solidFill>
+                <a:latin typeface="Open Sans"/>
+              </a:rPr>
+              <a:t>No VidaPlus</a:t>
+            </a:r>
+          </a:p>
+        </p:txBody>
+      </p:sp>
+      <p:sp>
+        <p:nvSpPr>
+          <p:cNvPr id="5" name="TextBox 4"/>
           <p:cNvSpPr txBox="1"/>
           <p:nvPr/>
         </p:nvSpPr>
         <p:spPr>
           <a:xfrm>
-            <a:off x="868680" y="1783080"/>
-            <a:ext cx="10515600" cy="4572000"/>
-          </a:xfrm>
-          <a:prstGeom prst="rect">
-            <a:avLst/>
-          </a:prstGeom>
-          <a:noFill/>
-        </p:spPr>
-        <p:txBody>
-          <a:bodyPr wrap="square">
-            <a:spAutoFit/>
-          </a:bodyPr>
-          <a:lstStyle/>
-          <a:p>
-            <a:pPr algn="l">
-              <a:lnSpc>
-                <a:spcPct val="110000"/>
-              </a:lnSpc>
-              <a:spcAft>
-                <a:spcPts val="1400"/>
-              </a:spcAft>
-            </a:pPr>
-            <a:r>
-              <a:rPr sz="2000" b="1">
-                <a:solidFill>
-                  <a:srgbClr val="7CB342"/>
-                </a:solidFill>
-                <a:latin typeface="Open Sans"/>
-              </a:rPr>
-              <a:t>▸ </a:t>
-            </a:r>
-            <a:r>
-              <a:rPr sz="1800" b="1">
-                <a:solidFill>
-                  <a:srgbClr val="2D7A3D"/>
-                </a:solidFill>
-                <a:latin typeface="Open Sans"/>
-              </a:rPr>
-              <a:t>Catálogo: </a:t>
-            </a:r>
-            <a:r>
-              <a:rPr sz="1800">
-                <a:solidFill>
-                  <a:srgbClr val="212121"/>
-                </a:solidFill>
-                <a:latin typeface="Open Sans"/>
-              </a:rPr>
-              <a:t>consolide RFS + RGS, identificados como tais.</a:t>
-            </a:r>
-          </a:p>
-          <a:p>
-            <a:pPr algn="l">
-              <a:lnSpc>
-                <a:spcPct val="110000"/>
-              </a:lnSpc>
-              <a:spcAft>
-                <a:spcPts val="1400"/>
-              </a:spcAft>
-            </a:pPr>
-            <a:r>
-              <a:rPr sz="2000" b="1">
-                <a:solidFill>
-                  <a:srgbClr val="7CB342"/>
-                </a:solidFill>
-                <a:latin typeface="Open Sans"/>
-              </a:rPr>
-              <a:t>▸ </a:t>
-            </a:r>
-            <a:r>
-              <a:rPr sz="1800" b="1">
-                <a:solidFill>
-                  <a:srgbClr val="2D7A3D"/>
-                </a:solidFill>
-                <a:latin typeface="Open Sans"/>
-              </a:rPr>
-              <a:t>Representações: </a:t>
-            </a:r>
-            <a:r>
-              <a:rPr sz="1800">
-                <a:solidFill>
-                  <a:srgbClr val="212121"/>
-                </a:solidFill>
-                <a:latin typeface="Open Sans"/>
-              </a:rPr>
-              <a:t>≥2 por P0 (shall/EARS/BDD/ASVS/policy-as-code).</a:t>
-            </a:r>
-          </a:p>
-          <a:p>
-            <a:pPr algn="l">
-              <a:lnSpc>
-                <a:spcPct val="110000"/>
-              </a:lnSpc>
-              <a:spcAft>
-                <a:spcPts val="1400"/>
-              </a:spcAft>
-            </a:pPr>
-            <a:r>
-              <a:rPr sz="2000" b="1">
-                <a:solidFill>
-                  <a:srgbClr val="7CB342"/>
-                </a:solidFill>
-                <a:latin typeface="Open Sans"/>
-              </a:rPr>
-              <a:t>▸ </a:t>
-            </a:r>
-            <a:r>
-              <a:rPr sz="1800" b="1">
-                <a:solidFill>
-                  <a:srgbClr val="2D7A3D"/>
-                </a:solidFill>
-                <a:latin typeface="Open Sans"/>
-              </a:rPr>
-              <a:t>Priorize: </a:t>
-            </a:r>
-            <a:r>
-              <a:rPr sz="1800">
-                <a:solidFill>
-                  <a:srgbClr val="212121"/>
-                </a:solidFill>
-                <a:latin typeface="Open Sans"/>
-              </a:rPr>
-              <a:t>CVSS/DREAD + EPSS/KEV -&gt; P0/P1/P2.</a:t>
-            </a:r>
-          </a:p>
-          <a:p>
-            <a:pPr algn="l">
-              <a:lnSpc>
-                <a:spcPct val="110000"/>
-              </a:lnSpc>
-              <a:spcAft>
-                <a:spcPts val="1400"/>
-              </a:spcAft>
-            </a:pPr>
-            <a:r>
-              <a:rPr sz="2000" b="1">
-                <a:solidFill>
-                  <a:srgbClr val="7CB342"/>
-                </a:solidFill>
-                <a:latin typeface="Open Sans"/>
-              </a:rPr>
-              <a:t>▸ </a:t>
-            </a:r>
-            <a:r>
-              <a:rPr sz="1800" b="1">
-                <a:solidFill>
-                  <a:srgbClr val="2D7A3D"/>
-                </a:solidFill>
-                <a:latin typeface="Open Sans"/>
-              </a:rPr>
-              <a:t>Fail-secure: </a:t>
-            </a:r>
-            <a:r>
-              <a:rPr sz="1800">
-                <a:solidFill>
-                  <a:srgbClr val="212121"/>
-                </a:solidFill>
-                <a:latin typeface="Open Sans"/>
-              </a:rPr>
-              <a:t>defina o comportamento sob falha de cada controle.</a:t>
-            </a:r>
-          </a:p>
-          <a:p>
-            <a:pPr algn="l">
-              <a:lnSpc>
-                <a:spcPct val="110000"/>
-              </a:lnSpc>
-              <a:spcAft>
-                <a:spcPts val="1400"/>
-              </a:spcAft>
-            </a:pPr>
-            <a:r>
-              <a:rPr sz="2000" b="1">
-                <a:solidFill>
-                  <a:srgbClr val="7CB342"/>
-                </a:solidFill>
-                <a:latin typeface="Open Sans"/>
-              </a:rPr>
-              <a:t>▸ </a:t>
-            </a:r>
-            <a:r>
-              <a:rPr sz="1800" b="1">
-                <a:solidFill>
-                  <a:srgbClr val="2D7A3D"/>
-                </a:solidFill>
-                <a:latin typeface="Open Sans"/>
-              </a:rPr>
-              <a:t>DoD segura: </a:t>
-            </a:r>
-            <a:r>
-              <a:rPr sz="1800">
-                <a:solidFill>
-                  <a:srgbClr val="212121"/>
-                </a:solidFill>
-                <a:latin typeface="Open Sans"/>
-              </a:rPr>
-              <a:t>critérios que fecham uma funcionalidade.</a:t>
-            </a:r>
-          </a:p>
-        </p:txBody>
-      </p:sp>
-      <p:sp>
-        <p:nvSpPr>
-          <p:cNvPr id="7" name="TextBox 6"/>
-          <p:cNvSpPr txBox="1"/>
-          <p:nvPr/>
-        </p:nvSpPr>
-        <p:spPr>
-          <a:xfrm>
-            <a:off x="10972800" y="6446520"/>
-            <a:ext cx="914400" cy="320040"/>
+            <a:off x="457200" y="4297680"/>
+            <a:ext cx="11247120" cy="457200"/>
           </a:xfrm>
           <a:prstGeom prst="rect">
             <a:avLst/>
@@ -8296,7 +9544,7 @@
           </a:bodyPr>
           <a:lstStyle/>
           <a:p>
-            <a:pPr algn="r">
+            <a:pPr algn="ctr">
               <a:lnSpc>
                 <a:spcPct val="100000"/>
               </a:lnSpc>
@@ -8308,14 +9556,58 @@
               </a:spcAft>
             </a:pPr>
             <a:r>
-              <a:rPr sz="1100" b="0" i="0">
-                <a:solidFill>
-                  <a:srgbClr val="616161"/>
-                </a:solidFill>
-                <a:latin typeface="Open Sans"/>
-              </a:rPr>
-              <a:t>9</a:t>
-            </a:r>
+              <a:rPr sz="2200" b="0" i="1">
+                <a:solidFill>
+                  <a:srgbClr val="CCD7C0"/>
+                </a:solidFill>
+                <a:latin typeface="Open Sans"/>
+              </a:rPr>
+              <a:t>A etapa desta semana (Fase 3)</a:t>
+            </a:r>
+          </a:p>
+        </p:txBody>
+      </p:sp>
+      <p:sp>
+        <p:nvSpPr>
+          <p:cNvPr id="6" name="Rectangle 5"/>
+          <p:cNvSpPr/>
+          <p:nvPr/>
+        </p:nvSpPr>
+        <p:spPr>
+          <a:xfrm>
+            <a:off x="5184648" y="4983480"/>
+            <a:ext cx="1828800" cy="25400"/>
+          </a:xfrm>
+          <a:prstGeom prst="rect">
+            <a:avLst/>
+          </a:prstGeom>
+          <a:solidFill>
+            <a:srgbClr val="7CB342"/>
+          </a:solidFill>
+          <a:ln>
+            <a:noFill/>
+          </a:ln>
+          <a:effectLst/>
+        </p:spPr>
+        <p:style>
+          <a:lnRef idx="1">
+            <a:schemeClr val="accent1"/>
+          </a:lnRef>
+          <a:fillRef idx="3">
+            <a:schemeClr val="accent1"/>
+          </a:fillRef>
+          <a:effectRef idx="2">
+            <a:schemeClr val="accent1"/>
+          </a:effectRef>
+          <a:fontRef idx="minor">
+            <a:schemeClr val="lt1"/>
+          </a:fontRef>
+        </p:style>
+        <p:txBody>
+          <a:bodyPr rtlCol="0" anchor="ctr"/>
+          <a:lstStyle/>
+          <a:p>
+            <a:pPr algn="ctr"/>
           </a:p>
         </p:txBody>
       </p:sp>
@@ -8645,4 +9937,324 @@
   </a:objectDefaults>
   <a:extraClrSchemeLst/>
 </a:theme>
+</file>
+
+<file path=ppt/theme/theme2.xml><?xml version="1.0" encoding="utf-8"?>
+<a:theme xmlns:a="http://schemas.openxmlformats.org/drawingml/2006/main" name="Office Theme">
+  <a:themeElements>
+    <a:clrScheme name="Office">
+      <a:dk1>
+        <a:sysClr val="windowText" lastClr="000000"/>
+      </a:dk1>
+      <a:lt1>
+        <a:sysClr val="window" lastClr="FFFFFF"/>
+      </a:lt1>
+      <a:dk2>
+        <a:srgbClr val="1F497D"/>
+      </a:dk2>
+      <a:lt2>
+        <a:srgbClr val="EEECE1"/>
+      </a:lt2>
+      <a:accent1>
+        <a:srgbClr val="4F81BD"/>
+      </a:accent1>
+      <a:accent2>
+        <a:srgbClr val="C0504D"/>
+      </a:accent2>
+      <a:accent3>
+        <a:srgbClr val="9BBB59"/>
+      </a:accent3>
+      <a:accent4>
+        <a:srgbClr val="8064A2"/>
+      </a:accent4>
+      <a:accent5>
+        <a:srgbClr val="4BACC6"/>
+      </a:accent5>
+      <a:accent6>
+        <a:srgbClr val="F79646"/>
+      </a:accent6>
+      <a:hlink>
+        <a:srgbClr val="0000FF"/>
+      </a:hlink>
+      <a:folHlink>
+        <a:srgbClr val="800080"/>
+      </a:folHlink>
+    </a:clrScheme>
+    <a:fontScheme name="Office">
+      <a:majorFont>
+        <a:latin typeface="Calibri"/>
+        <a:ea typeface=""/>
+        <a:cs typeface=""/>
+        <a:font script="Jpan" typeface="ＭＳ Ｐゴシック"/>
+        <a:font script="Hang" typeface="맑은 고딕"/>
+        <a:font script="Hans" typeface="宋体"/>
+        <a:font script="Hant" typeface="新細明體"/>
+        <a:font script="Arab" typeface="Times New Roman"/>
+        <a:font script="Hebr" typeface="Times New Roman"/>
+        <a:font script="Thai" typeface="Angsana New"/>
+        <a:font script="Ethi" typeface="Nyala"/>
+        <a:font script="Beng" typeface="Vrinda"/>
+        <a:font script="Gujr" typeface="Shruti"/>
+        <a:font script="Khmr" typeface="MoolBoran"/>
+        <a:font script="Knda" typeface="Tunga"/>
+        <a:font script="Guru" typeface="Raavi"/>
+        <a:font script="Cans" typeface="Euphemia"/>
+        <a:font script="Cher" typeface="Plantagenet Cherokee"/>
+        <a:font script="Yiii" typeface="Microsoft Yi Baiti"/>
+        <a:font script="Tibt" typeface="Microsoft Himalaya"/>
+        <a:font script="Thaa" typeface="MV Boli"/>
+        <a:font script="Deva" typeface="Mangal"/>
+        <a:font script="Telu" typeface="Gautami"/>
+        <a:font script="Taml" typeface="Latha"/>
+        <a:font script="Syrc" typeface="Estrangelo Edessa"/>
+        <a:font script="Orya" typeface="Kalinga"/>
+        <a:font script="Mlym" typeface="Kartika"/>
+        <a:font script="Laoo" typeface="DokChampa"/>
+        <a:font script="Sinh" typeface="Iskoola Pota"/>
+        <a:font script="Mong" typeface="Mongolian Baiti"/>
+        <a:font script="Viet" typeface="Times New Roman"/>
+        <a:font script="Uigh" typeface="Microsoft Uighur"/>
+        <a:font script="Geor" typeface="Sylfaen"/>
+      </a:majorFont>
+      <a:minorFont>
+        <a:latin typeface="Calibri"/>
+        <a:ea typeface=""/>
+        <a:cs typeface=""/>
+        <a:font script="Jpan" typeface="ＭＳ Ｐゴシック"/>
+        <a:font script="Hang" typeface="맑은 고딕"/>
+        <a:font script="Hans" typeface="宋体"/>
+        <a:font script="Hant" typeface="新細明體"/>
+        <a:font script="Arab" typeface="Arial"/>
+        <a:font script="Hebr" typeface="Arial"/>
+        <a:font script="Thai" typeface="Cordia New"/>
+        <a:font script="Ethi" typeface="Nyala"/>
+        <a:font script="Beng" typeface="Vrinda"/>
+        <a:font script="Gujr" typeface="Shruti"/>
+        <a:font script="Khmr" typeface="DaunPenh"/>
+        <a:font script="Knda" typeface="Tunga"/>
+        <a:font script="Guru" typeface="Raavi"/>
+        <a:font script="Cans" typeface="Euphemia"/>
+        <a:font script="Cher" typeface="Plantagenet Cherokee"/>
+        <a:font script="Yiii" typeface="Microsoft Yi Baiti"/>
+        <a:font script="Tibt" typeface="Microsoft Himalaya"/>
+        <a:font script="Thaa" typeface="MV Boli"/>
+        <a:font script="Deva" typeface="Mangal"/>
+        <a:font script="Telu" typeface="Gautami"/>
+        <a:font script="Taml" typeface="Latha"/>
+        <a:font script="Syrc" typeface="Estrangelo Edessa"/>
+        <a:font script="Orya" typeface="Kalinga"/>
+        <a:font script="Mlym" typeface="Kartika"/>
+        <a:font script="Laoo" typeface="DokChampa"/>
+        <a:font script="Sinh" typeface="Iskoola Pota"/>
+        <a:font script="Mong" typeface="Mongolian Baiti"/>
+        <a:font script="Viet" typeface="Arial"/>
+        <a:font script="Uigh" typeface="Microsoft Uighur"/>
+        <a:font script="Geor" typeface="Sylfaen"/>
+      </a:minorFont>
+    </a:fontScheme>
+    <a:fmtScheme name="Office">
+      <a:fillStyleLst>
+        <a:solidFill>
+          <a:schemeClr val="phClr"/>
+        </a:solidFill>
+        <a:gradFill rotWithShape="1">
+          <a:gsLst>
+            <a:gs pos="0">
+              <a:schemeClr val="phClr">
+                <a:tint val="50000"/>
+                <a:satMod val="300000"/>
+              </a:schemeClr>
+            </a:gs>
+            <a:gs pos="35000">
+              <a:schemeClr val="phClr">
+                <a:tint val="37000"/>
+                <a:satMod val="300000"/>
+              </a:schemeClr>
+            </a:gs>
+            <a:gs pos="100000">
+              <a:schemeClr val="phClr">
+                <a:tint val="15000"/>
+                <a:satMod val="350000"/>
+              </a:schemeClr>
+            </a:gs>
+          </a:gsLst>
+          <a:lin ang="16200000" scaled="1"/>
+        </a:gradFill>
+        <a:gradFill rotWithShape="1">
+          <a:gsLst>
+            <a:gs pos="0">
+              <a:schemeClr val="phClr">
+                <a:tint val="100000"/>
+                <a:shade val="100000"/>
+                <a:satMod val="130000"/>
+              </a:schemeClr>
+            </a:gs>
+            <a:gs pos="100000">
+              <a:schemeClr val="phClr">
+                <a:tint val="50000"/>
+                <a:shade val="100000"/>
+                <a:satMod val="350000"/>
+              </a:schemeClr>
+            </a:gs>
+          </a:gsLst>
+          <a:lin ang="16200000" scaled="0"/>
+        </a:gradFill>
+      </a:fillStyleLst>
+      <a:lnStyleLst>
+        <a:ln w="9525" cap="flat" cmpd="sng" algn="ctr">
+          <a:solidFill>
+            <a:schemeClr val="phClr">
+              <a:shade val="95000"/>
+              <a:satMod val="105000"/>
+            </a:schemeClr>
+          </a:solidFill>
+          <a:prstDash val="solid"/>
+        </a:ln>
+        <a:ln w="25400" cap="flat" cmpd="sng" algn="ctr">
+          <a:solidFill>
+            <a:schemeClr val="phClr"/>
+          </a:solidFill>
+          <a:prstDash val="solid"/>
+        </a:ln>
+        <a:ln w="38100" cap="flat" cmpd="sng" algn="ctr">
+          <a:solidFill>
+            <a:schemeClr val="phClr"/>
+          </a:solidFill>
+          <a:prstDash val="solid"/>
+        </a:ln>
+      </a:lnStyleLst>
+      <a:effectStyleLst>
+        <a:effectStyle>
+          <a:effectLst>
+            <a:outerShdw blurRad="40000" dist="20000" dir="5400000" rotWithShape="0">
+              <a:srgbClr val="000000">
+                <a:alpha val="38000"/>
+              </a:srgbClr>
+            </a:outerShdw>
+          </a:effectLst>
+        </a:effectStyle>
+        <a:effectStyle>
+          <a:effectLst>
+            <a:outerShdw blurRad="40000" dist="23000" dir="5400000" rotWithShape="0">
+              <a:srgbClr val="000000">
+                <a:alpha val="35000"/>
+              </a:srgbClr>
+            </a:outerShdw>
+          </a:effectLst>
+        </a:effectStyle>
+        <a:effectStyle>
+          <a:effectLst>
+            <a:outerShdw blurRad="40000" dist="23000" dir="5400000" rotWithShape="0">
+              <a:srgbClr val="000000">
+                <a:alpha val="35000"/>
+              </a:srgbClr>
+            </a:outerShdw>
+          </a:effectLst>
+          <a:scene3d>
+            <a:camera prst="orthographicFront">
+              <a:rot lat="0" lon="0" rev="0"/>
+            </a:camera>
+            <a:lightRig rig="threePt" dir="t">
+              <a:rot lat="0" lon="0" rev="1200000"/>
+            </a:lightRig>
+          </a:scene3d>
+          <a:sp3d>
+            <a:bevelT w="63500" h="25400"/>
+          </a:sp3d>
+        </a:effectStyle>
+      </a:effectStyleLst>
+      <a:bgFillStyleLst>
+        <a:solidFill>
+          <a:schemeClr val="phClr"/>
+        </a:solidFill>
+        <a:gradFill rotWithShape="1">
+          <a:gsLst>
+            <a:gs pos="0">
+              <a:schemeClr val="phClr">
+                <a:tint val="40000"/>
+                <a:satMod val="350000"/>
+              </a:schemeClr>
+            </a:gs>
+            <a:gs pos="40000">
+              <a:schemeClr val="phClr">
+                <a:tint val="45000"/>
+                <a:shade val="99000"/>
+                <a:satMod val="350000"/>
+              </a:schemeClr>
+            </a:gs>
+            <a:gs pos="100000">
+              <a:schemeClr val="phClr">
+                <a:shade val="20000"/>
+                <a:satMod val="255000"/>
+              </a:schemeClr>
+            </a:gs>
+          </a:gsLst>
+          <a:path path="circle">
+            <a:fillToRect l="50000" t="-80000" r="50000" b="180000"/>
+          </a:path>
+        </a:gradFill>
+        <a:gradFill rotWithShape="1">
+          <a:gsLst>
+            <a:gs pos="0">
+              <a:schemeClr val="phClr">
+                <a:tint val="80000"/>
+                <a:satMod val="300000"/>
+              </a:schemeClr>
+            </a:gs>
+            <a:gs pos="100000">
+              <a:schemeClr val="phClr">
+                <a:shade val="30000"/>
+                <a:satMod val="200000"/>
+              </a:schemeClr>
+            </a:gs>
+          </a:gsLst>
+          <a:path path="circle">
+            <a:fillToRect l="50000" t="50000" r="50000" b="50000"/>
+          </a:path>
+        </a:gradFill>
+      </a:bgFillStyleLst>
+    </a:fmtScheme>
+  </a:themeElements>
+  <a:objectDefaults>
+    <a:spDef>
+      <a:spPr/>
+      <a:bodyPr/>
+      <a:lstStyle/>
+      <a:style>
+        <a:lnRef idx="1">
+          <a:schemeClr val="accent1"/>
+        </a:lnRef>
+        <a:fillRef idx="3">
+          <a:schemeClr val="accent1"/>
+        </a:fillRef>
+        <a:effectRef idx="2">
+          <a:schemeClr val="accent1"/>
+        </a:effectRef>
+        <a:fontRef idx="minor">
+          <a:schemeClr val="lt1"/>
+        </a:fontRef>
+      </a:style>
+    </a:spDef>
+    <a:lnDef>
+      <a:spPr/>
+      <a:bodyPr/>
+      <a:lstStyle/>
+      <a:style>
+        <a:lnRef idx="2">
+          <a:schemeClr val="accent1"/>
+        </a:lnRef>
+        <a:fillRef idx="0">
+          <a:schemeClr val="accent1"/>
+        </a:fillRef>
+        <a:effectRef idx="1">
+          <a:schemeClr val="accent1"/>
+        </a:effectRef>
+        <a:fontRef idx="minor">
+          <a:schemeClr val="tx1"/>
+        </a:fontRef>
+      </a:style>
+    </a:lnDef>
+  </a:objectDefaults>
+  <a:extraClrSchemeLst/>
+</a:theme>
 </file>
--- a/aulas/aula-05-projeto-seguro.pptx
+++ b/aulas/aula-05-projeto-seguro.pptx
@@ -4422,7 +4422,7 @@
                 </a:solidFill>
                 <a:latin typeface="Open Sans"/>
               </a:rPr>
-              <a:t>Especificação e priorização</a:t>
+              <a:t>Catálogo consolidado + priorização + DoD (dossiê §5)</a:t>
             </a:r>
           </a:p>
         </p:txBody>
@@ -4519,7 +4519,7 @@
                 </a:solidFill>
                 <a:latin typeface="Open Sans"/>
               </a:rPr>
-              <a:t>Catálogo: </a:t>
+              <a:t>Entregar: </a:t>
             </a:r>
             <a:r>
               <a:rPr sz="1800">
@@ -4528,7 +4528,7 @@
                 </a:solidFill>
                 <a:latin typeface="Open Sans"/>
               </a:rPr>
-              <a:t>consolide RFS + RGS, identificados como tais.</a:t>
+              <a:t>catálogo único de RFS + RGS, cada um marcado como tal.</a:t>
             </a:r>
           </a:p>
           <a:p>
@@ -4556,7 +4556,7 @@
                 </a:solidFill>
                 <a:latin typeface="Open Sans"/>
               </a:rPr>
-              <a:t>Representações: </a:t>
+              <a:t>Priorize: </a:t>
             </a:r>
             <a:r>
               <a:rPr sz="1800">
@@ -4565,7 +4565,7 @@
                 </a:solidFill>
                 <a:latin typeface="Open Sans"/>
               </a:rPr>
-              <a:t>≥2 por requisito P0 (shall/EARS/BDD/ASVS/policy-as-code).</a:t>
+              <a:t>gravidade (CVSS/DREAD) × exploração real (EPSS/KEV) -&gt; P0, P1 ou P2.</a:t>
             </a:r>
           </a:p>
           <a:p>
@@ -4593,7 +4593,7 @@
                 </a:solidFill>
                 <a:latin typeface="Open Sans"/>
               </a:rPr>
-              <a:t>Priorize: </a:t>
+              <a:t>Representações: </a:t>
             </a:r>
             <a:r>
               <a:rPr sz="1800">
@@ -4602,7 +4602,7 @@
                 </a:solidFill>
                 <a:latin typeface="Open Sans"/>
               </a:rPr>
-              <a:t>CVSS/DREAD + EPSS/KEV -&gt; P0/P1/P2.</a:t>
+              <a:t>≥2 por requisito P0 (shall/EARS/BDD/ASVS/policy-as-code).</a:t>
             </a:r>
           </a:p>
           <a:p>
@@ -4630,7 +4630,7 @@
                 </a:solidFill>
                 <a:latin typeface="Open Sans"/>
               </a:rPr>
-              <a:t>Fail-secure: </a:t>
+              <a:t>Fail-secure + DoD: </a:t>
             </a:r>
             <a:r>
               <a:rPr sz="1800">
@@ -4639,7 +4639,7 @@
                 </a:solidFill>
                 <a:latin typeface="Open Sans"/>
               </a:rPr>
-              <a:t>defina o comportamento sob falha de cada controle.</a:t>
+              <a:t>comportamento sob falha de cada controle + critérios de 'pronto'.</a:t>
             </a:r>
           </a:p>
           <a:p>
@@ -4667,7 +4667,7 @@
                 </a:solidFill>
                 <a:latin typeface="Open Sans"/>
               </a:rPr>
-              <a:t>DoD segura: </a:t>
+              <a:t>Pronto quando: </a:t>
             </a:r>
             <a:r>
               <a:rPr sz="1800">
@@ -4676,7 +4676,7 @@
                 </a:solidFill>
                 <a:latin typeface="Open Sans"/>
               </a:rPr>
-              <a:t>escreva os critérios que fecham uma funcionalidade.</a:t>
+              <a:t>todo achado tem prioridade e a DoD está escrita.</a:t>
             </a:r>
           </a:p>
         </p:txBody>

--- a/aulas/aula-05-projeto-seguro.pptx
+++ b/aulas/aula-05-projeto-seguro.pptx
@@ -4225,7 +4225,7 @@
                 </a:solidFill>
                 <a:latin typeface="Open Sans"/>
               </a:rPr>
-              <a:t>TADS · Segurança em Sistemas Computacionais</a:t>
+              <a:t>TADS · Segurança de Sistemas Computacionais</a:t>
             </a:r>
           </a:p>
         </p:txBody>
